--- a/assets/figures-editable/c3-c4/c3-e12.pptx
+++ b/assets/figures-editable/c3-c4/c3-e12.pptx
@@ -3104,8 +3104,8 @@
         </p:nvSpPr>
         <p:spPr>
           <a:xfrm>
-            <a:off x="274320" y="137160"/>
-            <a:ext cx="11612880" cy="365760"/>
+            <a:off x="274320" y="118872"/>
+            <a:ext cx="11612880" cy="340105"/>
           </a:xfrm>
           <a:prstGeom prst="rect">
             <a:avLst/>
@@ -3114,7 +3114,7 @@
           <a:effectLst/>
         </p:spPr>
         <p:txBody>
-          <a:bodyPr wrap="square" lIns="27432" rIns="27432" tIns="18288" bIns="18288" anchor="ctr">
+          <a:bodyPr wrap="none" lIns="18288" rIns="18288" tIns="18288" bIns="18288" anchor="t">
             <a:spAutoFit/>
           </a:bodyPr>
           <a:lstStyle/>
@@ -3125,7 +3125,7 @@
               </a:spcAft>
             </a:pPr>
             <a:r>
-              <a:rPr sz="2100" b="0" i="0">
+              <a:rPr sz="1900" b="1" i="0">
                 <a:solidFill>
                   <a:srgbClr val="8EDBD4"/>
                 </a:solidFill>
@@ -3138,21 +3138,764 @@
       </p:sp>
       <p:sp>
         <p:nvSpPr>
-          <p:cNvPr id="3" name="C3-E12 ellipse 1" descr="sci-ppt:o001"/>
+          <p:cNvPr id="3" name="C3-E12 round_rect 1" descr="sci-ppt:o001"/>
           <p:cNvSpPr/>
           <p:nvPr/>
         </p:nvSpPr>
         <p:spPr>
           <a:xfrm>
-            <a:off x="987551" y="1078992"/>
-            <a:ext cx="585216" cy="585216"/>
-          </a:xfrm>
-          <a:prstGeom prst="ellipse">
+            <a:off x="365760" y="914400"/>
+            <a:ext cx="4023360" cy="4846320"/>
+          </a:xfrm>
+          <a:prstGeom prst="roundRect">
             <a:avLst/>
           </a:prstGeom>
           <a:solidFill>
             <a:srgbClr val="213E4B"/>
           </a:solidFill>
+          <a:ln w="20320">
+            <a:solidFill>
+              <a:srgbClr val="8EDBD4"/>
+            </a:solidFill>
+          </a:ln>
+          <a:effectLst/>
+        </p:spPr>
+        <p:txBody>
+          <a:bodyPr rtlCol="0" anchor="ctr"/>
+          <a:lstStyle/>
+          <a:p>
+            <a:pPr algn="ctr"/>
+          </a:p>
+        </p:txBody>
+      </p:sp>
+      <p:sp>
+        <p:nvSpPr>
+          <p:cNvPr id="4" name="C3-E12 text 2" descr="sci-ppt:o002"/>
+          <p:cNvSpPr txBox="1"/>
+          <p:nvPr/>
+        </p:nvSpPr>
+        <p:spPr>
+          <a:xfrm>
+            <a:off x="475488" y="969264"/>
+            <a:ext cx="3803904" cy="254889"/>
+          </a:xfrm>
+          <a:prstGeom prst="rect">
+            <a:avLst/>
+          </a:prstGeom>
+          <a:noFill/>
+          <a:effectLst/>
+        </p:spPr>
+        <p:txBody>
+          <a:bodyPr wrap="none" lIns="18288" rIns="18288" tIns="18288" bIns="18288" anchor="t">
+            <a:spAutoFit/>
+          </a:bodyPr>
+          <a:lstStyle/>
+          <a:p>
+            <a:pPr algn="l">
+              <a:spcAft>
+                <a:spcPts val="0"/>
+              </a:spcAft>
+            </a:pPr>
+            <a:r>
+              <a:rPr sz="1350" b="1" i="0">
+                <a:solidFill>
+                  <a:srgbClr val="8EDBD4"/>
+                </a:solidFill>
+                <a:latin typeface="Arial"/>
+              </a:rPr>
+              <a:t>Bubbles in a cubic lattice</a:t>
+            </a:r>
+          </a:p>
+        </p:txBody>
+      </p:sp>
+      <p:sp>
+        <p:nvSpPr>
+          <p:cNvPr id="5" name="C3-E12 ellipse 3" descr="sci-ppt:o003"/>
+          <p:cNvSpPr/>
+          <p:nvPr/>
+        </p:nvSpPr>
+        <p:spPr>
+          <a:xfrm>
+            <a:off x="813815" y="1499616"/>
+            <a:ext cx="384048" cy="384048"/>
+          </a:xfrm>
+          <a:prstGeom prst="ellipse">
+            <a:avLst/>
+          </a:prstGeom>
+          <a:solidFill>
+            <a:srgbClr val="0C1820"/>
+          </a:solidFill>
+          <a:ln w="20320">
+            <a:solidFill>
+              <a:srgbClr val="F2B880"/>
+            </a:solidFill>
+          </a:ln>
+          <a:effectLst/>
+        </p:spPr>
+        <p:txBody>
+          <a:bodyPr rtlCol="0" anchor="ctr"/>
+          <a:lstStyle/>
+          <a:p>
+            <a:pPr algn="ctr"/>
+          </a:p>
+        </p:txBody>
+      </p:sp>
+      <p:sp>
+        <p:nvSpPr>
+          <p:cNvPr id="6" name="C3-E12 ellipse 4" descr="sci-ppt:o004"/>
+          <p:cNvSpPr/>
+          <p:nvPr/>
+        </p:nvSpPr>
+        <p:spPr>
+          <a:xfrm>
+            <a:off x="813815" y="2157984"/>
+            <a:ext cx="384048" cy="384048"/>
+          </a:xfrm>
+          <a:prstGeom prst="ellipse">
+            <a:avLst/>
+          </a:prstGeom>
+          <a:solidFill>
+            <a:srgbClr val="0C1820"/>
+          </a:solidFill>
+          <a:ln w="20320">
+            <a:solidFill>
+              <a:srgbClr val="F2B880"/>
+            </a:solidFill>
+          </a:ln>
+          <a:effectLst/>
+        </p:spPr>
+        <p:txBody>
+          <a:bodyPr rtlCol="0" anchor="ctr"/>
+          <a:lstStyle/>
+          <a:p>
+            <a:pPr algn="ctr"/>
+          </a:p>
+        </p:txBody>
+      </p:sp>
+      <p:sp>
+        <p:nvSpPr>
+          <p:cNvPr id="7" name="C3-E12 ellipse 5" descr="sci-ppt:o005"/>
+          <p:cNvSpPr/>
+          <p:nvPr/>
+        </p:nvSpPr>
+        <p:spPr>
+          <a:xfrm>
+            <a:off x="813815" y="2816352"/>
+            <a:ext cx="384048" cy="384048"/>
+          </a:xfrm>
+          <a:prstGeom prst="ellipse">
+            <a:avLst/>
+          </a:prstGeom>
+          <a:solidFill>
+            <a:srgbClr val="0C1820"/>
+          </a:solidFill>
+          <a:ln w="20320">
+            <a:solidFill>
+              <a:srgbClr val="F2B880"/>
+            </a:solidFill>
+          </a:ln>
+          <a:effectLst/>
+        </p:spPr>
+        <p:txBody>
+          <a:bodyPr rtlCol="0" anchor="ctr"/>
+          <a:lstStyle/>
+          <a:p>
+            <a:pPr algn="ctr"/>
+          </a:p>
+        </p:txBody>
+      </p:sp>
+      <p:sp>
+        <p:nvSpPr>
+          <p:cNvPr id="8" name="C3-E12 ellipse 6" descr="sci-ppt:o006"/>
+          <p:cNvSpPr/>
+          <p:nvPr/>
+        </p:nvSpPr>
+        <p:spPr>
+          <a:xfrm>
+            <a:off x="813815" y="3474720"/>
+            <a:ext cx="384048" cy="384048"/>
+          </a:xfrm>
+          <a:prstGeom prst="ellipse">
+            <a:avLst/>
+          </a:prstGeom>
+          <a:solidFill>
+            <a:srgbClr val="0C1820"/>
+          </a:solidFill>
+          <a:ln w="20320">
+            <a:solidFill>
+              <a:srgbClr val="F2B880"/>
+            </a:solidFill>
+          </a:ln>
+          <a:effectLst/>
+        </p:spPr>
+        <p:txBody>
+          <a:bodyPr rtlCol="0" anchor="ctr"/>
+          <a:lstStyle/>
+          <a:p>
+            <a:pPr algn="ctr"/>
+          </a:p>
+        </p:txBody>
+      </p:sp>
+      <p:sp>
+        <p:nvSpPr>
+          <p:cNvPr id="9" name="C3-E12 ellipse 7" descr="sci-ppt:o007"/>
+          <p:cNvSpPr/>
+          <p:nvPr/>
+        </p:nvSpPr>
+        <p:spPr>
+          <a:xfrm>
+            <a:off x="1472184" y="1499616"/>
+            <a:ext cx="384048" cy="384048"/>
+          </a:xfrm>
+          <a:prstGeom prst="ellipse">
+            <a:avLst/>
+          </a:prstGeom>
+          <a:solidFill>
+            <a:srgbClr val="0C1820"/>
+          </a:solidFill>
+          <a:ln w="20320">
+            <a:solidFill>
+              <a:srgbClr val="F2B880"/>
+            </a:solidFill>
+          </a:ln>
+          <a:effectLst/>
+        </p:spPr>
+        <p:txBody>
+          <a:bodyPr rtlCol="0" anchor="ctr"/>
+          <a:lstStyle/>
+          <a:p>
+            <a:pPr algn="ctr"/>
+          </a:p>
+        </p:txBody>
+      </p:sp>
+      <p:sp>
+        <p:nvSpPr>
+          <p:cNvPr id="10" name="C3-E12 ellipse 8" descr="sci-ppt:o008"/>
+          <p:cNvSpPr/>
+          <p:nvPr/>
+        </p:nvSpPr>
+        <p:spPr>
+          <a:xfrm>
+            <a:off x="1472184" y="2157984"/>
+            <a:ext cx="384048" cy="384048"/>
+          </a:xfrm>
+          <a:prstGeom prst="ellipse">
+            <a:avLst/>
+          </a:prstGeom>
+          <a:solidFill>
+            <a:srgbClr val="0C1820"/>
+          </a:solidFill>
+          <a:ln w="20320">
+            <a:solidFill>
+              <a:srgbClr val="F2B880"/>
+            </a:solidFill>
+          </a:ln>
+          <a:effectLst/>
+        </p:spPr>
+        <p:txBody>
+          <a:bodyPr rtlCol="0" anchor="ctr"/>
+          <a:lstStyle/>
+          <a:p>
+            <a:pPr algn="ctr"/>
+          </a:p>
+        </p:txBody>
+      </p:sp>
+      <p:sp>
+        <p:nvSpPr>
+          <p:cNvPr id="11" name="C3-E12 ellipse 9" descr="sci-ppt:o009"/>
+          <p:cNvSpPr/>
+          <p:nvPr/>
+        </p:nvSpPr>
+        <p:spPr>
+          <a:xfrm>
+            <a:off x="1472184" y="2816352"/>
+            <a:ext cx="384048" cy="384048"/>
+          </a:xfrm>
+          <a:prstGeom prst="ellipse">
+            <a:avLst/>
+          </a:prstGeom>
+          <a:solidFill>
+            <a:srgbClr val="0C1820"/>
+          </a:solidFill>
+          <a:ln w="20320">
+            <a:solidFill>
+              <a:srgbClr val="F2B880"/>
+            </a:solidFill>
+          </a:ln>
+          <a:effectLst/>
+        </p:spPr>
+        <p:txBody>
+          <a:bodyPr rtlCol="0" anchor="ctr"/>
+          <a:lstStyle/>
+          <a:p>
+            <a:pPr algn="ctr"/>
+          </a:p>
+        </p:txBody>
+      </p:sp>
+      <p:sp>
+        <p:nvSpPr>
+          <p:cNvPr id="12" name="C3-E12 ellipse 10" descr="sci-ppt:o010"/>
+          <p:cNvSpPr/>
+          <p:nvPr/>
+        </p:nvSpPr>
+        <p:spPr>
+          <a:xfrm>
+            <a:off x="1472184" y="3474720"/>
+            <a:ext cx="384048" cy="384048"/>
+          </a:xfrm>
+          <a:prstGeom prst="ellipse">
+            <a:avLst/>
+          </a:prstGeom>
+          <a:solidFill>
+            <a:srgbClr val="0C1820"/>
+          </a:solidFill>
+          <a:ln w="20320">
+            <a:solidFill>
+              <a:srgbClr val="F2B880"/>
+            </a:solidFill>
+          </a:ln>
+          <a:effectLst/>
+        </p:spPr>
+        <p:txBody>
+          <a:bodyPr rtlCol="0" anchor="ctr"/>
+          <a:lstStyle/>
+          <a:p>
+            <a:pPr algn="ctr"/>
+          </a:p>
+        </p:txBody>
+      </p:sp>
+      <p:sp>
+        <p:nvSpPr>
+          <p:cNvPr id="13" name="C3-E12 ellipse 11" descr="sci-ppt:o011"/>
+          <p:cNvSpPr/>
+          <p:nvPr/>
+        </p:nvSpPr>
+        <p:spPr>
+          <a:xfrm>
+            <a:off x="2130551" y="1499616"/>
+            <a:ext cx="384048" cy="384048"/>
+          </a:xfrm>
+          <a:prstGeom prst="ellipse">
+            <a:avLst/>
+          </a:prstGeom>
+          <a:solidFill>
+            <a:srgbClr val="0C1820"/>
+          </a:solidFill>
+          <a:ln w="20320">
+            <a:solidFill>
+              <a:srgbClr val="F2B880"/>
+            </a:solidFill>
+          </a:ln>
+          <a:effectLst/>
+        </p:spPr>
+        <p:txBody>
+          <a:bodyPr rtlCol="0" anchor="ctr"/>
+          <a:lstStyle/>
+          <a:p>
+            <a:pPr algn="ctr"/>
+          </a:p>
+        </p:txBody>
+      </p:sp>
+      <p:sp>
+        <p:nvSpPr>
+          <p:cNvPr id="14" name="C3-E12 ellipse 12" descr="sci-ppt:o012"/>
+          <p:cNvSpPr/>
+          <p:nvPr/>
+        </p:nvSpPr>
+        <p:spPr>
+          <a:xfrm>
+            <a:off x="2130551" y="2157984"/>
+            <a:ext cx="384048" cy="384048"/>
+          </a:xfrm>
+          <a:prstGeom prst="ellipse">
+            <a:avLst/>
+          </a:prstGeom>
+          <a:solidFill>
+            <a:srgbClr val="0C1820"/>
+          </a:solidFill>
+          <a:ln w="20320">
+            <a:solidFill>
+              <a:srgbClr val="F2B880"/>
+            </a:solidFill>
+          </a:ln>
+          <a:effectLst/>
+        </p:spPr>
+        <p:txBody>
+          <a:bodyPr rtlCol="0" anchor="ctr"/>
+          <a:lstStyle/>
+          <a:p>
+            <a:pPr algn="ctr"/>
+          </a:p>
+        </p:txBody>
+      </p:sp>
+      <p:sp>
+        <p:nvSpPr>
+          <p:cNvPr id="15" name="C3-E12 ellipse 13" descr="sci-ppt:o013"/>
+          <p:cNvSpPr/>
+          <p:nvPr/>
+        </p:nvSpPr>
+        <p:spPr>
+          <a:xfrm>
+            <a:off x="2130551" y="2816352"/>
+            <a:ext cx="384048" cy="384048"/>
+          </a:xfrm>
+          <a:prstGeom prst="ellipse">
+            <a:avLst/>
+          </a:prstGeom>
+          <a:solidFill>
+            <a:srgbClr val="0C1820"/>
+          </a:solidFill>
+          <a:ln w="20320">
+            <a:solidFill>
+              <a:srgbClr val="F2B880"/>
+            </a:solidFill>
+          </a:ln>
+          <a:effectLst/>
+        </p:spPr>
+        <p:txBody>
+          <a:bodyPr rtlCol="0" anchor="ctr"/>
+          <a:lstStyle/>
+          <a:p>
+            <a:pPr algn="ctr"/>
+          </a:p>
+        </p:txBody>
+      </p:sp>
+      <p:sp>
+        <p:nvSpPr>
+          <p:cNvPr id="16" name="C3-E12 ellipse 14" descr="sci-ppt:o014"/>
+          <p:cNvSpPr/>
+          <p:nvPr/>
+        </p:nvSpPr>
+        <p:spPr>
+          <a:xfrm>
+            <a:off x="2130551" y="3474720"/>
+            <a:ext cx="384048" cy="384048"/>
+          </a:xfrm>
+          <a:prstGeom prst="ellipse">
+            <a:avLst/>
+          </a:prstGeom>
+          <a:solidFill>
+            <a:srgbClr val="0C1820"/>
+          </a:solidFill>
+          <a:ln w="20320">
+            <a:solidFill>
+              <a:srgbClr val="F2B880"/>
+            </a:solidFill>
+          </a:ln>
+          <a:effectLst/>
+        </p:spPr>
+        <p:txBody>
+          <a:bodyPr rtlCol="0" anchor="ctr"/>
+          <a:lstStyle/>
+          <a:p>
+            <a:pPr algn="ctr"/>
+          </a:p>
+        </p:txBody>
+      </p:sp>
+      <p:sp>
+        <p:nvSpPr>
+          <p:cNvPr id="17" name="C3-E12 ellipse 15" descr="sci-ppt:o015"/>
+          <p:cNvSpPr/>
+          <p:nvPr/>
+        </p:nvSpPr>
+        <p:spPr>
+          <a:xfrm>
+            <a:off x="2788920" y="1499616"/>
+            <a:ext cx="384048" cy="384048"/>
+          </a:xfrm>
+          <a:prstGeom prst="ellipse">
+            <a:avLst/>
+          </a:prstGeom>
+          <a:solidFill>
+            <a:srgbClr val="0C1820"/>
+          </a:solidFill>
+          <a:ln w="20320">
+            <a:solidFill>
+              <a:srgbClr val="F2B880"/>
+            </a:solidFill>
+          </a:ln>
+          <a:effectLst/>
+        </p:spPr>
+        <p:txBody>
+          <a:bodyPr rtlCol="0" anchor="ctr"/>
+          <a:lstStyle/>
+          <a:p>
+            <a:pPr algn="ctr"/>
+          </a:p>
+        </p:txBody>
+      </p:sp>
+      <p:sp>
+        <p:nvSpPr>
+          <p:cNvPr id="18" name="C3-E12 ellipse 16" descr="sci-ppt:o016"/>
+          <p:cNvSpPr/>
+          <p:nvPr/>
+        </p:nvSpPr>
+        <p:spPr>
+          <a:xfrm>
+            <a:off x="2788920" y="2157984"/>
+            <a:ext cx="384048" cy="384048"/>
+          </a:xfrm>
+          <a:prstGeom prst="ellipse">
+            <a:avLst/>
+          </a:prstGeom>
+          <a:solidFill>
+            <a:srgbClr val="0C1820"/>
+          </a:solidFill>
+          <a:ln w="20320">
+            <a:solidFill>
+              <a:srgbClr val="F2B880"/>
+            </a:solidFill>
+          </a:ln>
+          <a:effectLst/>
+        </p:spPr>
+        <p:txBody>
+          <a:bodyPr rtlCol="0" anchor="ctr"/>
+          <a:lstStyle/>
+          <a:p>
+            <a:pPr algn="ctr"/>
+          </a:p>
+        </p:txBody>
+      </p:sp>
+      <p:sp>
+        <p:nvSpPr>
+          <p:cNvPr id="19" name="C3-E12 ellipse 17" descr="sci-ppt:o017"/>
+          <p:cNvSpPr/>
+          <p:nvPr/>
+        </p:nvSpPr>
+        <p:spPr>
+          <a:xfrm>
+            <a:off x="2788920" y="2816352"/>
+            <a:ext cx="384048" cy="384048"/>
+          </a:xfrm>
+          <a:prstGeom prst="ellipse">
+            <a:avLst/>
+          </a:prstGeom>
+          <a:solidFill>
+            <a:srgbClr val="0C1820"/>
+          </a:solidFill>
+          <a:ln w="20320">
+            <a:solidFill>
+              <a:srgbClr val="F2B880"/>
+            </a:solidFill>
+          </a:ln>
+          <a:effectLst/>
+        </p:spPr>
+        <p:txBody>
+          <a:bodyPr rtlCol="0" anchor="ctr"/>
+          <a:lstStyle/>
+          <a:p>
+            <a:pPr algn="ctr"/>
+          </a:p>
+        </p:txBody>
+      </p:sp>
+      <p:sp>
+        <p:nvSpPr>
+          <p:cNvPr id="20" name="C3-E12 ellipse 18" descr="sci-ppt:o018"/>
+          <p:cNvSpPr/>
+          <p:nvPr/>
+        </p:nvSpPr>
+        <p:spPr>
+          <a:xfrm>
+            <a:off x="2788920" y="3474720"/>
+            <a:ext cx="384048" cy="384048"/>
+          </a:xfrm>
+          <a:prstGeom prst="ellipse">
+            <a:avLst/>
+          </a:prstGeom>
+          <a:solidFill>
+            <a:srgbClr val="0C1820"/>
+          </a:solidFill>
+          <a:ln w="20320">
+            <a:solidFill>
+              <a:srgbClr val="F2B880"/>
+            </a:solidFill>
+          </a:ln>
+          <a:effectLst/>
+        </p:spPr>
+        <p:txBody>
+          <a:bodyPr rtlCol="0" anchor="ctr"/>
+          <a:lstStyle/>
+          <a:p>
+            <a:pPr algn="ctr"/>
+          </a:p>
+        </p:txBody>
+      </p:sp>
+      <p:cxnSp>
+        <p:nvCxnSpPr>
+          <p:cNvPr id="21" name="C3-E12 line 19" descr="sci-ppt:o019"/>
+          <p:cNvCxnSpPr/>
+          <p:nvPr/>
+        </p:nvCxnSpPr>
+        <p:spPr>
+          <a:xfrm>
+            <a:off x="1005839" y="4526280"/>
+            <a:ext cx="658368" cy="0"/>
+          </a:xfrm>
+          <a:prstGeom prst="line">
+            <a:avLst/>
+          </a:prstGeom>
+          <a:ln w="16510">
+            <a:solidFill>
+              <a:srgbClr val="B4C7D2"/>
+            </a:solidFill>
+          </a:ln>
+          <a:effectLst/>
+        </p:spPr>
+      </p:cxnSp>
+      <p:cxnSp>
+        <p:nvCxnSpPr>
+          <p:cNvPr id="22" name="C3-E12 line 20" descr="sci-ppt:o020"/>
+          <p:cNvCxnSpPr/>
+          <p:nvPr/>
+        </p:nvCxnSpPr>
+        <p:spPr>
+          <a:xfrm>
+            <a:off x="1005839" y="4462272"/>
+            <a:ext cx="0" cy="128016"/>
+          </a:xfrm>
+          <a:prstGeom prst="line">
+            <a:avLst/>
+          </a:prstGeom>
+          <a:ln w="16510">
+            <a:solidFill>
+              <a:srgbClr val="B4C7D2"/>
+            </a:solidFill>
+          </a:ln>
+          <a:effectLst/>
+        </p:spPr>
+      </p:cxnSp>
+      <p:cxnSp>
+        <p:nvCxnSpPr>
+          <p:cNvPr id="23" name="C3-E12 line 21" descr="sci-ppt:o021"/>
+          <p:cNvCxnSpPr/>
+          <p:nvPr/>
+        </p:nvCxnSpPr>
+        <p:spPr>
+          <a:xfrm>
+            <a:off x="1664207" y="4462272"/>
+            <a:ext cx="0" cy="128016"/>
+          </a:xfrm>
+          <a:prstGeom prst="line">
+            <a:avLst/>
+          </a:prstGeom>
+          <a:ln w="16510">
+            <a:solidFill>
+              <a:srgbClr val="B4C7D2"/>
+            </a:solidFill>
+          </a:ln>
+          <a:effectLst/>
+        </p:spPr>
+      </p:cxnSp>
+      <p:sp>
+        <p:nvSpPr>
+          <p:cNvPr id="24" name="C3-E12 text 22" descr="sci-ppt:o022"/>
+          <p:cNvSpPr txBox="1"/>
+          <p:nvPr/>
+        </p:nvSpPr>
+        <p:spPr>
+          <a:xfrm>
+            <a:off x="420623" y="4255770"/>
+            <a:ext cx="1828800" cy="223900"/>
+          </a:xfrm>
+          <a:prstGeom prst="rect">
+            <a:avLst/>
+          </a:prstGeom>
+          <a:noFill/>
+          <a:effectLst/>
+        </p:spPr>
+        <p:txBody>
+          <a:bodyPr wrap="none" lIns="18288" rIns="18288" tIns="18288" bIns="18288" anchor="t">
+            <a:spAutoFit/>
+          </a:bodyPr>
+          <a:lstStyle/>
+          <a:p>
+            <a:pPr algn="ctr">
+              <a:spcAft>
+                <a:spcPts val="0"/>
+              </a:spcAft>
+            </a:pPr>
+            <a:r>
+              <a:rPr sz="1150" b="0" i="0">
+                <a:solidFill>
+                  <a:srgbClr val="B4C7D2"/>
+                </a:solidFill>
+                <a:latin typeface="Arial"/>
+              </a:rPr>
+              <a:t>s</a:t>
+            </a:r>
+          </a:p>
+        </p:txBody>
+      </p:sp>
+      <p:sp>
+        <p:nvSpPr>
+          <p:cNvPr id="25" name="C3-E12 text 23" descr="sci-ppt:o023"/>
+          <p:cNvSpPr txBox="1"/>
+          <p:nvPr/>
+        </p:nvSpPr>
+        <p:spPr>
+          <a:xfrm>
+            <a:off x="502920" y="4892040"/>
+            <a:ext cx="3749039" cy="417576"/>
+          </a:xfrm>
+          <a:prstGeom prst="rect">
+            <a:avLst/>
+          </a:prstGeom>
+          <a:noFill/>
+          <a:effectLst/>
+        </p:spPr>
+        <p:txBody>
+          <a:bodyPr wrap="none" lIns="18288" rIns="18288" tIns="18288" bIns="18288" anchor="t">
+            <a:spAutoFit/>
+          </a:bodyPr>
+          <a:lstStyle/>
+          <a:p>
+            <a:pPr algn="l">
+              <a:spcAft>
+                <a:spcPts val="0"/>
+              </a:spcAft>
+            </a:pPr>
+            <a:r>
+              <a:rPr sz="1200" b="0" i="0">
+                <a:solidFill>
+                  <a:srgbClr val="E7F0F3"/>
+                </a:solidFill>
+                <a:latin typeface="Arial"/>
+              </a:rPr>
+              <a:t>φ_b = Σ Vᵢ / V_Ω = (4π/3) R³ / s³ for one</a:t>
+            </a:r>
+          </a:p>
+          <a:p>
+            <a:pPr algn="l">
+              <a:spcAft>
+                <a:spcPts val="0"/>
+              </a:spcAft>
+            </a:pPr>
+            <a:r>
+              <a:rPr sz="1200" b="0" i="0">
+                <a:solidFill>
+                  <a:srgbClr val="E7F0F3"/>
+                </a:solidFill>
+                <a:latin typeface="Arial"/>
+              </a:rPr>
+              <a:t>bubble per cell.</a:t>
+            </a:r>
+          </a:p>
+        </p:txBody>
+      </p:sp>
+      <p:cxnSp>
+        <p:nvCxnSpPr>
+          <p:cNvPr id="26" name="C3-E12 line 24" descr="sci-ppt:o024"/>
+          <p:cNvCxnSpPr/>
+          <p:nvPr/>
+        </p:nvCxnSpPr>
+        <p:spPr>
+          <a:xfrm>
+            <a:off x="5669280" y="4754880"/>
+            <a:ext cx="3200400" cy="0"/>
+          </a:xfrm>
+          <a:prstGeom prst="line">
+            <a:avLst/>
+          </a:prstGeom>
           <a:ln w="19050">
             <a:solidFill>
               <a:srgbClr val="B4C7D2"/>
@@ -3160,29 +3903,1768 @@
           </a:ln>
           <a:effectLst/>
         </p:spPr>
-        <p:txBody>
-          <a:bodyPr rtlCol="0" anchor="ctr"/>
-          <a:lstStyle/>
-          <a:p>
-            <a:pPr algn="ctr"/>
-          </a:p>
-        </p:txBody>
-      </p:sp>
+      </p:cxnSp>
       <p:cxnSp>
         <p:nvCxnSpPr>
-          <p:cNvPr id="4" name="C3-E12 arrow 2" descr="sci-ppt:o002"/>
+          <p:cNvPr id="27" name="C3-E12 line 25" descr="sci-ppt:o025"/>
           <p:cNvCxnSpPr/>
           <p:nvPr/>
         </p:nvCxnSpPr>
         <p:spPr>
           <a:xfrm>
-            <a:off x="1600200" y="1371600"/>
-            <a:ext cx="6903720" cy="640080"/>
+            <a:off x="5669280" y="1371600"/>
+            <a:ext cx="0" cy="3383280"/>
           </a:xfrm>
           <a:prstGeom prst="line">
             <a:avLst/>
           </a:prstGeom>
-          <a:ln w="25400">
+          <a:ln w="19050">
+            <a:solidFill>
+              <a:srgbClr val="B4C7D2"/>
+            </a:solidFill>
+          </a:ln>
+          <a:effectLst/>
+        </p:spPr>
+      </p:cxnSp>
+      <p:cxnSp>
+        <p:nvCxnSpPr>
+          <p:cNvPr id="28" name="C3-E12 line 26" descr="sci-ppt:o026"/>
+          <p:cNvCxnSpPr/>
+          <p:nvPr/>
+        </p:nvCxnSpPr>
+        <p:spPr>
+          <a:xfrm>
+            <a:off x="5669280" y="4754880"/>
+            <a:ext cx="0" cy="64008"/>
+          </a:xfrm>
+          <a:prstGeom prst="line">
+            <a:avLst/>
+          </a:prstGeom>
+          <a:ln w="12700">
+            <a:solidFill>
+              <a:srgbClr val="B4C7D2"/>
+            </a:solidFill>
+          </a:ln>
+          <a:effectLst/>
+        </p:spPr>
+      </p:cxnSp>
+      <p:cxnSp>
+        <p:nvCxnSpPr>
+          <p:cNvPr id="29" name="C3-E12 line 27" descr="sci-ppt:o027"/>
+          <p:cNvCxnSpPr/>
+          <p:nvPr/>
+        </p:nvCxnSpPr>
+        <p:spPr>
+          <a:xfrm>
+            <a:off x="5669280" y="1371600"/>
+            <a:ext cx="0" cy="3383280"/>
+          </a:xfrm>
+          <a:prstGeom prst="line">
+            <a:avLst/>
+          </a:prstGeom>
+          <a:ln w="7620">
+            <a:solidFill>
+              <a:srgbClr val="2E4756"/>
+            </a:solidFill>
+          </a:ln>
+          <a:effectLst/>
+        </p:spPr>
+      </p:cxnSp>
+      <p:sp>
+        <p:nvSpPr>
+          <p:cNvPr id="30" name="C3-E12 text 28" descr="sci-ppt:o028"/>
+          <p:cNvSpPr txBox="1"/>
+          <p:nvPr/>
+        </p:nvSpPr>
+        <p:spPr>
+          <a:xfrm>
+            <a:off x="5212080" y="4837176"/>
+            <a:ext cx="914400" cy="208407"/>
+          </a:xfrm>
+          <a:prstGeom prst="rect">
+            <a:avLst/>
+          </a:prstGeom>
+          <a:noFill/>
+          <a:effectLst/>
+        </p:spPr>
+        <p:txBody>
+          <a:bodyPr wrap="none" lIns="18288" rIns="18288" tIns="18288" bIns="18288" anchor="t">
+            <a:spAutoFit/>
+          </a:bodyPr>
+          <a:lstStyle/>
+          <a:p>
+            <a:pPr algn="ctr">
+              <a:spcAft>
+                <a:spcPts val="0"/>
+              </a:spcAft>
+            </a:pPr>
+            <a:r>
+              <a:rPr sz="1050" b="0" i="0">
+                <a:solidFill>
+                  <a:srgbClr val="B4C7D2"/>
+                </a:solidFill>
+                <a:latin typeface="Arial"/>
+              </a:rPr>
+              <a:t>0.0</a:t>
+            </a:r>
+          </a:p>
+        </p:txBody>
+      </p:sp>
+      <p:cxnSp>
+        <p:nvCxnSpPr>
+          <p:cNvPr id="31" name="C3-E12 line 29" descr="sci-ppt:o029"/>
+          <p:cNvCxnSpPr/>
+          <p:nvPr/>
+        </p:nvCxnSpPr>
+        <p:spPr>
+          <a:xfrm>
+            <a:off x="6309360" y="4754880"/>
+            <a:ext cx="0" cy="64008"/>
+          </a:xfrm>
+          <a:prstGeom prst="line">
+            <a:avLst/>
+          </a:prstGeom>
+          <a:ln w="12700">
+            <a:solidFill>
+              <a:srgbClr val="B4C7D2"/>
+            </a:solidFill>
+          </a:ln>
+          <a:effectLst/>
+        </p:spPr>
+      </p:cxnSp>
+      <p:cxnSp>
+        <p:nvCxnSpPr>
+          <p:cNvPr id="32" name="C3-E12 line 30" descr="sci-ppt:o030"/>
+          <p:cNvCxnSpPr/>
+          <p:nvPr/>
+        </p:nvCxnSpPr>
+        <p:spPr>
+          <a:xfrm>
+            <a:off x="6309360" y="1371600"/>
+            <a:ext cx="0" cy="3383280"/>
+          </a:xfrm>
+          <a:prstGeom prst="line">
+            <a:avLst/>
+          </a:prstGeom>
+          <a:ln w="7620">
+            <a:solidFill>
+              <a:srgbClr val="2E4756"/>
+            </a:solidFill>
+          </a:ln>
+          <a:effectLst/>
+        </p:spPr>
+      </p:cxnSp>
+      <p:sp>
+        <p:nvSpPr>
+          <p:cNvPr id="33" name="C3-E12 text 31" descr="sci-ppt:o031"/>
+          <p:cNvSpPr txBox="1"/>
+          <p:nvPr/>
+        </p:nvSpPr>
+        <p:spPr>
+          <a:xfrm>
+            <a:off x="5852160" y="4837176"/>
+            <a:ext cx="914400" cy="208407"/>
+          </a:xfrm>
+          <a:prstGeom prst="rect">
+            <a:avLst/>
+          </a:prstGeom>
+          <a:noFill/>
+          <a:effectLst/>
+        </p:spPr>
+        <p:txBody>
+          <a:bodyPr wrap="none" lIns="18288" rIns="18288" tIns="18288" bIns="18288" anchor="t">
+            <a:spAutoFit/>
+          </a:bodyPr>
+          <a:lstStyle/>
+          <a:p>
+            <a:pPr algn="ctr">
+              <a:spcAft>
+                <a:spcPts val="0"/>
+              </a:spcAft>
+            </a:pPr>
+            <a:r>
+              <a:rPr sz="1050" b="0" i="0">
+                <a:solidFill>
+                  <a:srgbClr val="B4C7D2"/>
+                </a:solidFill>
+                <a:latin typeface="Arial"/>
+              </a:rPr>
+              <a:t>0.1</a:t>
+            </a:r>
+          </a:p>
+        </p:txBody>
+      </p:sp>
+      <p:cxnSp>
+        <p:nvCxnSpPr>
+          <p:cNvPr id="34" name="C3-E12 line 32" descr="sci-ppt:o032"/>
+          <p:cNvCxnSpPr/>
+          <p:nvPr/>
+        </p:nvCxnSpPr>
+        <p:spPr>
+          <a:xfrm>
+            <a:off x="6949440" y="4754880"/>
+            <a:ext cx="0" cy="64008"/>
+          </a:xfrm>
+          <a:prstGeom prst="line">
+            <a:avLst/>
+          </a:prstGeom>
+          <a:ln w="12700">
+            <a:solidFill>
+              <a:srgbClr val="B4C7D2"/>
+            </a:solidFill>
+          </a:ln>
+          <a:effectLst/>
+        </p:spPr>
+      </p:cxnSp>
+      <p:cxnSp>
+        <p:nvCxnSpPr>
+          <p:cNvPr id="35" name="C3-E12 line 33" descr="sci-ppt:o033"/>
+          <p:cNvCxnSpPr/>
+          <p:nvPr/>
+        </p:nvCxnSpPr>
+        <p:spPr>
+          <a:xfrm>
+            <a:off x="6949440" y="1371600"/>
+            <a:ext cx="0" cy="3383280"/>
+          </a:xfrm>
+          <a:prstGeom prst="line">
+            <a:avLst/>
+          </a:prstGeom>
+          <a:ln w="7620">
+            <a:solidFill>
+              <a:srgbClr val="2E4756"/>
+            </a:solidFill>
+          </a:ln>
+          <a:effectLst/>
+        </p:spPr>
+      </p:cxnSp>
+      <p:sp>
+        <p:nvSpPr>
+          <p:cNvPr id="36" name="C3-E12 text 34" descr="sci-ppt:o034"/>
+          <p:cNvSpPr txBox="1"/>
+          <p:nvPr/>
+        </p:nvSpPr>
+        <p:spPr>
+          <a:xfrm>
+            <a:off x="6492240" y="4837176"/>
+            <a:ext cx="914400" cy="208407"/>
+          </a:xfrm>
+          <a:prstGeom prst="rect">
+            <a:avLst/>
+          </a:prstGeom>
+          <a:noFill/>
+          <a:effectLst/>
+        </p:spPr>
+        <p:txBody>
+          <a:bodyPr wrap="none" lIns="18288" rIns="18288" tIns="18288" bIns="18288" anchor="t">
+            <a:spAutoFit/>
+          </a:bodyPr>
+          <a:lstStyle/>
+          <a:p>
+            <a:pPr algn="ctr">
+              <a:spcAft>
+                <a:spcPts val="0"/>
+              </a:spcAft>
+            </a:pPr>
+            <a:r>
+              <a:rPr sz="1050" b="0" i="0">
+                <a:solidFill>
+                  <a:srgbClr val="B4C7D2"/>
+                </a:solidFill>
+                <a:latin typeface="Arial"/>
+              </a:rPr>
+              <a:t>0.2</a:t>
+            </a:r>
+          </a:p>
+        </p:txBody>
+      </p:sp>
+      <p:cxnSp>
+        <p:nvCxnSpPr>
+          <p:cNvPr id="37" name="C3-E12 line 35" descr="sci-ppt:o035"/>
+          <p:cNvCxnSpPr/>
+          <p:nvPr/>
+        </p:nvCxnSpPr>
+        <p:spPr>
+          <a:xfrm>
+            <a:off x="7589520" y="4754880"/>
+            <a:ext cx="0" cy="64008"/>
+          </a:xfrm>
+          <a:prstGeom prst="line">
+            <a:avLst/>
+          </a:prstGeom>
+          <a:ln w="12700">
+            <a:solidFill>
+              <a:srgbClr val="B4C7D2"/>
+            </a:solidFill>
+          </a:ln>
+          <a:effectLst/>
+        </p:spPr>
+      </p:cxnSp>
+      <p:cxnSp>
+        <p:nvCxnSpPr>
+          <p:cNvPr id="38" name="C3-E12 line 36" descr="sci-ppt:o036"/>
+          <p:cNvCxnSpPr/>
+          <p:nvPr/>
+        </p:nvCxnSpPr>
+        <p:spPr>
+          <a:xfrm>
+            <a:off x="7589520" y="1371600"/>
+            <a:ext cx="0" cy="3383280"/>
+          </a:xfrm>
+          <a:prstGeom prst="line">
+            <a:avLst/>
+          </a:prstGeom>
+          <a:ln w="7620">
+            <a:solidFill>
+              <a:srgbClr val="2E4756"/>
+            </a:solidFill>
+          </a:ln>
+          <a:effectLst/>
+        </p:spPr>
+      </p:cxnSp>
+      <p:sp>
+        <p:nvSpPr>
+          <p:cNvPr id="39" name="C3-E12 text 37" descr="sci-ppt:o037"/>
+          <p:cNvSpPr txBox="1"/>
+          <p:nvPr/>
+        </p:nvSpPr>
+        <p:spPr>
+          <a:xfrm>
+            <a:off x="7132320" y="4837176"/>
+            <a:ext cx="914400" cy="208407"/>
+          </a:xfrm>
+          <a:prstGeom prst="rect">
+            <a:avLst/>
+          </a:prstGeom>
+          <a:noFill/>
+          <a:effectLst/>
+        </p:spPr>
+        <p:txBody>
+          <a:bodyPr wrap="none" lIns="18288" rIns="18288" tIns="18288" bIns="18288" anchor="t">
+            <a:spAutoFit/>
+          </a:bodyPr>
+          <a:lstStyle/>
+          <a:p>
+            <a:pPr algn="ctr">
+              <a:spcAft>
+                <a:spcPts val="0"/>
+              </a:spcAft>
+            </a:pPr>
+            <a:r>
+              <a:rPr sz="1050" b="0" i="0">
+                <a:solidFill>
+                  <a:srgbClr val="B4C7D2"/>
+                </a:solidFill>
+                <a:latin typeface="Arial"/>
+              </a:rPr>
+              <a:t>0.3</a:t>
+            </a:r>
+          </a:p>
+        </p:txBody>
+      </p:sp>
+      <p:cxnSp>
+        <p:nvCxnSpPr>
+          <p:cNvPr id="40" name="C3-E12 line 38" descr="sci-ppt:o038"/>
+          <p:cNvCxnSpPr/>
+          <p:nvPr/>
+        </p:nvCxnSpPr>
+        <p:spPr>
+          <a:xfrm>
+            <a:off x="8229600" y="4754880"/>
+            <a:ext cx="0" cy="64008"/>
+          </a:xfrm>
+          <a:prstGeom prst="line">
+            <a:avLst/>
+          </a:prstGeom>
+          <a:ln w="12700">
+            <a:solidFill>
+              <a:srgbClr val="B4C7D2"/>
+            </a:solidFill>
+          </a:ln>
+          <a:effectLst/>
+        </p:spPr>
+      </p:cxnSp>
+      <p:cxnSp>
+        <p:nvCxnSpPr>
+          <p:cNvPr id="41" name="C3-E12 line 39" descr="sci-ppt:o039"/>
+          <p:cNvCxnSpPr/>
+          <p:nvPr/>
+        </p:nvCxnSpPr>
+        <p:spPr>
+          <a:xfrm>
+            <a:off x="8229600" y="1371600"/>
+            <a:ext cx="0" cy="3383280"/>
+          </a:xfrm>
+          <a:prstGeom prst="line">
+            <a:avLst/>
+          </a:prstGeom>
+          <a:ln w="7620">
+            <a:solidFill>
+              <a:srgbClr val="2E4756"/>
+            </a:solidFill>
+          </a:ln>
+          <a:effectLst/>
+        </p:spPr>
+      </p:cxnSp>
+      <p:sp>
+        <p:nvSpPr>
+          <p:cNvPr id="42" name="C3-E12 text 40" descr="sci-ppt:o040"/>
+          <p:cNvSpPr txBox="1"/>
+          <p:nvPr/>
+        </p:nvSpPr>
+        <p:spPr>
+          <a:xfrm>
+            <a:off x="7772400" y="4837176"/>
+            <a:ext cx="914400" cy="208407"/>
+          </a:xfrm>
+          <a:prstGeom prst="rect">
+            <a:avLst/>
+          </a:prstGeom>
+          <a:noFill/>
+          <a:effectLst/>
+        </p:spPr>
+        <p:txBody>
+          <a:bodyPr wrap="none" lIns="18288" rIns="18288" tIns="18288" bIns="18288" anchor="t">
+            <a:spAutoFit/>
+          </a:bodyPr>
+          <a:lstStyle/>
+          <a:p>
+            <a:pPr algn="ctr">
+              <a:spcAft>
+                <a:spcPts val="0"/>
+              </a:spcAft>
+            </a:pPr>
+            <a:r>
+              <a:rPr sz="1050" b="0" i="0">
+                <a:solidFill>
+                  <a:srgbClr val="B4C7D2"/>
+                </a:solidFill>
+                <a:latin typeface="Arial"/>
+              </a:rPr>
+              <a:t>0.4</a:t>
+            </a:r>
+          </a:p>
+        </p:txBody>
+      </p:sp>
+      <p:cxnSp>
+        <p:nvCxnSpPr>
+          <p:cNvPr id="43" name="C3-E12 line 41" descr="sci-ppt:o041"/>
+          <p:cNvCxnSpPr/>
+          <p:nvPr/>
+        </p:nvCxnSpPr>
+        <p:spPr>
+          <a:xfrm>
+            <a:off x="8869680" y="4754880"/>
+            <a:ext cx="0" cy="64008"/>
+          </a:xfrm>
+          <a:prstGeom prst="line">
+            <a:avLst/>
+          </a:prstGeom>
+          <a:ln w="12700">
+            <a:solidFill>
+              <a:srgbClr val="B4C7D2"/>
+            </a:solidFill>
+          </a:ln>
+          <a:effectLst/>
+        </p:spPr>
+      </p:cxnSp>
+      <p:cxnSp>
+        <p:nvCxnSpPr>
+          <p:cNvPr id="44" name="C3-E12 line 42" descr="sci-ppt:o042"/>
+          <p:cNvCxnSpPr/>
+          <p:nvPr/>
+        </p:nvCxnSpPr>
+        <p:spPr>
+          <a:xfrm>
+            <a:off x="8869680" y="1371600"/>
+            <a:ext cx="0" cy="3383280"/>
+          </a:xfrm>
+          <a:prstGeom prst="line">
+            <a:avLst/>
+          </a:prstGeom>
+          <a:ln w="7620">
+            <a:solidFill>
+              <a:srgbClr val="2E4756"/>
+            </a:solidFill>
+          </a:ln>
+          <a:effectLst/>
+        </p:spPr>
+      </p:cxnSp>
+      <p:sp>
+        <p:nvSpPr>
+          <p:cNvPr id="45" name="C3-E12 text 43" descr="sci-ppt:o043"/>
+          <p:cNvSpPr txBox="1"/>
+          <p:nvPr/>
+        </p:nvSpPr>
+        <p:spPr>
+          <a:xfrm>
+            <a:off x="8412480" y="4837176"/>
+            <a:ext cx="914400" cy="208407"/>
+          </a:xfrm>
+          <a:prstGeom prst="rect">
+            <a:avLst/>
+          </a:prstGeom>
+          <a:noFill/>
+          <a:effectLst/>
+        </p:spPr>
+        <p:txBody>
+          <a:bodyPr wrap="none" lIns="18288" rIns="18288" tIns="18288" bIns="18288" anchor="t">
+            <a:spAutoFit/>
+          </a:bodyPr>
+          <a:lstStyle/>
+          <a:p>
+            <a:pPr algn="ctr">
+              <a:spcAft>
+                <a:spcPts val="0"/>
+              </a:spcAft>
+            </a:pPr>
+            <a:r>
+              <a:rPr sz="1050" b="0" i="0">
+                <a:solidFill>
+                  <a:srgbClr val="B4C7D2"/>
+                </a:solidFill>
+                <a:latin typeface="Arial"/>
+              </a:rPr>
+              <a:t>0.5</a:t>
+            </a:r>
+          </a:p>
+        </p:txBody>
+      </p:sp>
+      <p:cxnSp>
+        <p:nvCxnSpPr>
+          <p:cNvPr id="46" name="C3-E12 line 44" descr="sci-ppt:o044"/>
+          <p:cNvCxnSpPr/>
+          <p:nvPr/>
+        </p:nvCxnSpPr>
+        <p:spPr>
+          <a:xfrm>
+            <a:off x="5605272" y="4754880"/>
+            <a:ext cx="64008" cy="0"/>
+          </a:xfrm>
+          <a:prstGeom prst="line">
+            <a:avLst/>
+          </a:prstGeom>
+          <a:ln w="12700">
+            <a:solidFill>
+              <a:srgbClr val="B4C7D2"/>
+            </a:solidFill>
+          </a:ln>
+          <a:effectLst/>
+        </p:spPr>
+      </p:cxnSp>
+      <p:cxnSp>
+        <p:nvCxnSpPr>
+          <p:cNvPr id="47" name="C3-E12 line 45" descr="sci-ppt:o045"/>
+          <p:cNvCxnSpPr/>
+          <p:nvPr/>
+        </p:nvCxnSpPr>
+        <p:spPr>
+          <a:xfrm>
+            <a:off x="5605272" y="4139738"/>
+            <a:ext cx="64008" cy="0"/>
+          </a:xfrm>
+          <a:prstGeom prst="line">
+            <a:avLst/>
+          </a:prstGeom>
+          <a:ln w="12700">
+            <a:solidFill>
+              <a:srgbClr val="B4C7D2"/>
+            </a:solidFill>
+          </a:ln>
+          <a:effectLst/>
+        </p:spPr>
+      </p:cxnSp>
+      <p:cxnSp>
+        <p:nvCxnSpPr>
+          <p:cNvPr id="48" name="C3-E12 line 46" descr="sci-ppt:o046"/>
+          <p:cNvCxnSpPr/>
+          <p:nvPr/>
+        </p:nvCxnSpPr>
+        <p:spPr>
+          <a:xfrm>
+            <a:off x="5669280" y="4139738"/>
+            <a:ext cx="3200400" cy="0"/>
+          </a:xfrm>
+          <a:prstGeom prst="line">
+            <a:avLst/>
+          </a:prstGeom>
+          <a:ln w="7620">
+            <a:solidFill>
+              <a:srgbClr val="2E4756"/>
+            </a:solidFill>
+          </a:ln>
+          <a:effectLst/>
+        </p:spPr>
+      </p:cxnSp>
+      <p:sp>
+        <p:nvSpPr>
+          <p:cNvPr id="49" name="C3-E12 text 47" descr="sci-ppt:o047"/>
+          <p:cNvSpPr txBox="1"/>
+          <p:nvPr/>
+        </p:nvSpPr>
+        <p:spPr>
+          <a:xfrm>
+            <a:off x="4800600" y="4057442"/>
+            <a:ext cx="777240" cy="208407"/>
+          </a:xfrm>
+          <a:prstGeom prst="rect">
+            <a:avLst/>
+          </a:prstGeom>
+          <a:noFill/>
+          <a:effectLst/>
+        </p:spPr>
+        <p:txBody>
+          <a:bodyPr wrap="none" lIns="18288" rIns="18288" tIns="18288" bIns="18288" anchor="t">
+            <a:spAutoFit/>
+          </a:bodyPr>
+          <a:lstStyle/>
+          <a:p>
+            <a:pPr algn="r">
+              <a:spcAft>
+                <a:spcPts val="0"/>
+              </a:spcAft>
+            </a:pPr>
+            <a:r>
+              <a:rPr sz="1050" b="0" i="0">
+                <a:solidFill>
+                  <a:srgbClr val="B4C7D2"/>
+                </a:solidFill>
+                <a:latin typeface="Arial"/>
+              </a:rPr>
+              <a:t>0.1</a:t>
+            </a:r>
+          </a:p>
+        </p:txBody>
+      </p:sp>
+      <p:cxnSp>
+        <p:nvCxnSpPr>
+          <p:cNvPr id="50" name="C3-E12 line 48" descr="sci-ppt:o048"/>
+          <p:cNvCxnSpPr/>
+          <p:nvPr/>
+        </p:nvCxnSpPr>
+        <p:spPr>
+          <a:xfrm>
+            <a:off x="5605272" y="3524596"/>
+            <a:ext cx="64008" cy="0"/>
+          </a:xfrm>
+          <a:prstGeom prst="line">
+            <a:avLst/>
+          </a:prstGeom>
+          <a:ln w="12700">
+            <a:solidFill>
+              <a:srgbClr val="B4C7D2"/>
+            </a:solidFill>
+          </a:ln>
+          <a:effectLst/>
+        </p:spPr>
+      </p:cxnSp>
+      <p:cxnSp>
+        <p:nvCxnSpPr>
+          <p:cNvPr id="51" name="C3-E12 line 49" descr="sci-ppt:o049"/>
+          <p:cNvCxnSpPr/>
+          <p:nvPr/>
+        </p:nvCxnSpPr>
+        <p:spPr>
+          <a:xfrm>
+            <a:off x="5669280" y="3524596"/>
+            <a:ext cx="3200400" cy="0"/>
+          </a:xfrm>
+          <a:prstGeom prst="line">
+            <a:avLst/>
+          </a:prstGeom>
+          <a:ln w="7620">
+            <a:solidFill>
+              <a:srgbClr val="2E4756"/>
+            </a:solidFill>
+          </a:ln>
+          <a:effectLst/>
+        </p:spPr>
+      </p:cxnSp>
+      <p:sp>
+        <p:nvSpPr>
+          <p:cNvPr id="52" name="C3-E12 text 50" descr="sci-ppt:o050"/>
+          <p:cNvSpPr txBox="1"/>
+          <p:nvPr/>
+        </p:nvSpPr>
+        <p:spPr>
+          <a:xfrm>
+            <a:off x="4800600" y="3442300"/>
+            <a:ext cx="777240" cy="208407"/>
+          </a:xfrm>
+          <a:prstGeom prst="rect">
+            <a:avLst/>
+          </a:prstGeom>
+          <a:noFill/>
+          <a:effectLst/>
+        </p:spPr>
+        <p:txBody>
+          <a:bodyPr wrap="none" lIns="18288" rIns="18288" tIns="18288" bIns="18288" anchor="t">
+            <a:spAutoFit/>
+          </a:bodyPr>
+          <a:lstStyle/>
+          <a:p>
+            <a:pPr algn="r">
+              <a:spcAft>
+                <a:spcPts val="0"/>
+              </a:spcAft>
+            </a:pPr>
+            <a:r>
+              <a:rPr sz="1050" b="0" i="0">
+                <a:solidFill>
+                  <a:srgbClr val="B4C7D2"/>
+                </a:solidFill>
+                <a:latin typeface="Arial"/>
+              </a:rPr>
+              <a:t>0.2</a:t>
+            </a:r>
+          </a:p>
+        </p:txBody>
+      </p:sp>
+      <p:cxnSp>
+        <p:nvCxnSpPr>
+          <p:cNvPr id="53" name="C3-E12 line 51" descr="sci-ppt:o051"/>
+          <p:cNvCxnSpPr/>
+          <p:nvPr/>
+        </p:nvCxnSpPr>
+        <p:spPr>
+          <a:xfrm>
+            <a:off x="5605272" y="2909454"/>
+            <a:ext cx="64008" cy="0"/>
+          </a:xfrm>
+          <a:prstGeom prst="line">
+            <a:avLst/>
+          </a:prstGeom>
+          <a:ln w="12700">
+            <a:solidFill>
+              <a:srgbClr val="B4C7D2"/>
+            </a:solidFill>
+          </a:ln>
+          <a:effectLst/>
+        </p:spPr>
+      </p:cxnSp>
+      <p:cxnSp>
+        <p:nvCxnSpPr>
+          <p:cNvPr id="54" name="C3-E12 line 52" descr="sci-ppt:o052"/>
+          <p:cNvCxnSpPr/>
+          <p:nvPr/>
+        </p:nvCxnSpPr>
+        <p:spPr>
+          <a:xfrm>
+            <a:off x="5669280" y="2909454"/>
+            <a:ext cx="3200400" cy="0"/>
+          </a:xfrm>
+          <a:prstGeom prst="line">
+            <a:avLst/>
+          </a:prstGeom>
+          <a:ln w="7620">
+            <a:solidFill>
+              <a:srgbClr val="2E4756"/>
+            </a:solidFill>
+          </a:ln>
+          <a:effectLst/>
+        </p:spPr>
+      </p:cxnSp>
+      <p:sp>
+        <p:nvSpPr>
+          <p:cNvPr id="55" name="C3-E12 text 53" descr="sci-ppt:o053"/>
+          <p:cNvSpPr txBox="1"/>
+          <p:nvPr/>
+        </p:nvSpPr>
+        <p:spPr>
+          <a:xfrm>
+            <a:off x="4800600" y="2827158"/>
+            <a:ext cx="777240" cy="208407"/>
+          </a:xfrm>
+          <a:prstGeom prst="rect">
+            <a:avLst/>
+          </a:prstGeom>
+          <a:noFill/>
+          <a:effectLst/>
+        </p:spPr>
+        <p:txBody>
+          <a:bodyPr wrap="none" lIns="18288" rIns="18288" tIns="18288" bIns="18288" anchor="t">
+            <a:spAutoFit/>
+          </a:bodyPr>
+          <a:lstStyle/>
+          <a:p>
+            <a:pPr algn="r">
+              <a:spcAft>
+                <a:spcPts val="0"/>
+              </a:spcAft>
+            </a:pPr>
+            <a:r>
+              <a:rPr sz="1050" b="0" i="0">
+                <a:solidFill>
+                  <a:srgbClr val="B4C7D2"/>
+                </a:solidFill>
+                <a:latin typeface="Arial"/>
+              </a:rPr>
+              <a:t>0.3</a:t>
+            </a:r>
+          </a:p>
+        </p:txBody>
+      </p:sp>
+      <p:cxnSp>
+        <p:nvCxnSpPr>
+          <p:cNvPr id="56" name="C3-E12 line 54" descr="sci-ppt:o054"/>
+          <p:cNvCxnSpPr/>
+          <p:nvPr/>
+        </p:nvCxnSpPr>
+        <p:spPr>
+          <a:xfrm>
+            <a:off x="5605272" y="2294312"/>
+            <a:ext cx="64008" cy="0"/>
+          </a:xfrm>
+          <a:prstGeom prst="line">
+            <a:avLst/>
+          </a:prstGeom>
+          <a:ln w="12700">
+            <a:solidFill>
+              <a:srgbClr val="B4C7D2"/>
+            </a:solidFill>
+          </a:ln>
+          <a:effectLst/>
+        </p:spPr>
+      </p:cxnSp>
+      <p:cxnSp>
+        <p:nvCxnSpPr>
+          <p:cNvPr id="57" name="C3-E12 line 55" descr="sci-ppt:o055"/>
+          <p:cNvCxnSpPr/>
+          <p:nvPr/>
+        </p:nvCxnSpPr>
+        <p:spPr>
+          <a:xfrm>
+            <a:off x="5669280" y="2294312"/>
+            <a:ext cx="3200400" cy="0"/>
+          </a:xfrm>
+          <a:prstGeom prst="line">
+            <a:avLst/>
+          </a:prstGeom>
+          <a:ln w="7620">
+            <a:solidFill>
+              <a:srgbClr val="2E4756"/>
+            </a:solidFill>
+          </a:ln>
+          <a:effectLst/>
+        </p:spPr>
+      </p:cxnSp>
+      <p:sp>
+        <p:nvSpPr>
+          <p:cNvPr id="58" name="C3-E12 text 56" descr="sci-ppt:o056"/>
+          <p:cNvSpPr txBox="1"/>
+          <p:nvPr/>
+        </p:nvSpPr>
+        <p:spPr>
+          <a:xfrm>
+            <a:off x="4800600" y="2212016"/>
+            <a:ext cx="777240" cy="208407"/>
+          </a:xfrm>
+          <a:prstGeom prst="rect">
+            <a:avLst/>
+          </a:prstGeom>
+          <a:noFill/>
+          <a:effectLst/>
+        </p:spPr>
+        <p:txBody>
+          <a:bodyPr wrap="none" lIns="18288" rIns="18288" tIns="18288" bIns="18288" anchor="t">
+            <a:spAutoFit/>
+          </a:bodyPr>
+          <a:lstStyle/>
+          <a:p>
+            <a:pPr algn="r">
+              <a:spcAft>
+                <a:spcPts val="0"/>
+              </a:spcAft>
+            </a:pPr>
+            <a:r>
+              <a:rPr sz="1050" b="0" i="0">
+                <a:solidFill>
+                  <a:srgbClr val="B4C7D2"/>
+                </a:solidFill>
+                <a:latin typeface="Arial"/>
+              </a:rPr>
+              <a:t>0.4</a:t>
+            </a:r>
+          </a:p>
+        </p:txBody>
+      </p:sp>
+      <p:cxnSp>
+        <p:nvCxnSpPr>
+          <p:cNvPr id="59" name="C3-E12 line 57" descr="sci-ppt:o057"/>
+          <p:cNvCxnSpPr/>
+          <p:nvPr/>
+        </p:nvCxnSpPr>
+        <p:spPr>
+          <a:xfrm>
+            <a:off x="5605272" y="1679170"/>
+            <a:ext cx="64008" cy="0"/>
+          </a:xfrm>
+          <a:prstGeom prst="line">
+            <a:avLst/>
+          </a:prstGeom>
+          <a:ln w="12700">
+            <a:solidFill>
+              <a:srgbClr val="B4C7D2"/>
+            </a:solidFill>
+          </a:ln>
+          <a:effectLst/>
+        </p:spPr>
+      </p:cxnSp>
+      <p:cxnSp>
+        <p:nvCxnSpPr>
+          <p:cNvPr id="60" name="C3-E12 line 58" descr="sci-ppt:o058"/>
+          <p:cNvCxnSpPr/>
+          <p:nvPr/>
+        </p:nvCxnSpPr>
+        <p:spPr>
+          <a:xfrm>
+            <a:off x="5669280" y="1679170"/>
+            <a:ext cx="3200400" cy="0"/>
+          </a:xfrm>
+          <a:prstGeom prst="line">
+            <a:avLst/>
+          </a:prstGeom>
+          <a:ln w="7620">
+            <a:solidFill>
+              <a:srgbClr val="2E4756"/>
+            </a:solidFill>
+          </a:ln>
+          <a:effectLst/>
+        </p:spPr>
+      </p:cxnSp>
+      <p:sp>
+        <p:nvSpPr>
+          <p:cNvPr id="61" name="C3-E12 text 59" descr="sci-ppt:o059"/>
+          <p:cNvSpPr txBox="1"/>
+          <p:nvPr/>
+        </p:nvSpPr>
+        <p:spPr>
+          <a:xfrm>
+            <a:off x="4800600" y="1596874"/>
+            <a:ext cx="777240" cy="208407"/>
+          </a:xfrm>
+          <a:prstGeom prst="rect">
+            <a:avLst/>
+          </a:prstGeom>
+          <a:noFill/>
+          <a:effectLst/>
+        </p:spPr>
+        <p:txBody>
+          <a:bodyPr wrap="none" lIns="18288" rIns="18288" tIns="18288" bIns="18288" anchor="t">
+            <a:spAutoFit/>
+          </a:bodyPr>
+          <a:lstStyle/>
+          <a:p>
+            <a:pPr algn="r">
+              <a:spcAft>
+                <a:spcPts val="0"/>
+              </a:spcAft>
+            </a:pPr>
+            <a:r>
+              <a:rPr sz="1050" b="0" i="0">
+                <a:solidFill>
+                  <a:srgbClr val="B4C7D2"/>
+                </a:solidFill>
+                <a:latin typeface="Arial"/>
+              </a:rPr>
+              <a:t>0.5</a:t>
+            </a:r>
+          </a:p>
+        </p:txBody>
+      </p:sp>
+      <p:sp>
+        <p:nvSpPr>
+          <p:cNvPr id="62" name="C3-E12 text 60" descr="sci-ppt:o060"/>
+          <p:cNvSpPr txBox="1"/>
+          <p:nvPr/>
+        </p:nvSpPr>
+        <p:spPr>
+          <a:xfrm>
+            <a:off x="5669280" y="5038344"/>
+            <a:ext cx="3200400" cy="231648"/>
+          </a:xfrm>
+          <a:prstGeom prst="rect">
+            <a:avLst/>
+          </a:prstGeom>
+          <a:noFill/>
+          <a:effectLst/>
+        </p:spPr>
+        <p:txBody>
+          <a:bodyPr wrap="none" lIns="18288" rIns="18288" tIns="18288" bIns="18288" anchor="t">
+            <a:spAutoFit/>
+          </a:bodyPr>
+          <a:lstStyle/>
+          <a:p>
+            <a:pPr algn="ctr">
+              <a:spcAft>
+                <a:spcPts val="0"/>
+              </a:spcAft>
+            </a:pPr>
+            <a:r>
+              <a:rPr sz="1200" b="0" i="0">
+                <a:solidFill>
+                  <a:srgbClr val="E7F0F3"/>
+                </a:solidFill>
+                <a:latin typeface="Arial"/>
+              </a:rPr>
+              <a:t>R / s</a:t>
+            </a:r>
+          </a:p>
+        </p:txBody>
+      </p:sp>
+      <p:sp>
+        <p:nvSpPr>
+          <p:cNvPr id="63" name="C3-E12 text 61" descr="sci-ppt:o061"/>
+          <p:cNvSpPr txBox="1"/>
+          <p:nvPr/>
+        </p:nvSpPr>
+        <p:spPr>
+          <a:xfrm>
+            <a:off x="5120640" y="1024128"/>
+            <a:ext cx="3200400" cy="231648"/>
+          </a:xfrm>
+          <a:prstGeom prst="rect">
+            <a:avLst/>
+          </a:prstGeom>
+          <a:noFill/>
+          <a:effectLst/>
+        </p:spPr>
+        <p:txBody>
+          <a:bodyPr wrap="none" lIns="18288" rIns="18288" tIns="18288" bIns="18288" anchor="t">
+            <a:spAutoFit/>
+          </a:bodyPr>
+          <a:lstStyle/>
+          <a:p>
+            <a:pPr algn="l">
+              <a:spcAft>
+                <a:spcPts val="0"/>
+              </a:spcAft>
+            </a:pPr>
+            <a:r>
+              <a:rPr sz="1200" b="0" i="0">
+                <a:solidFill>
+                  <a:srgbClr val="E7F0F3"/>
+                </a:solidFill>
+                <a:latin typeface="Arial"/>
+              </a:rPr>
+              <a:t>volume fraction φ_b</a:t>
+            </a:r>
+          </a:p>
+        </p:txBody>
+      </p:sp>
+      <p:sp>
+        <p:nvSpPr>
+          <p:cNvPr id="64" name="C3-E12 polygon 62" descr="sci-ppt:o062"/>
+          <p:cNvSpPr/>
+          <p:nvPr/>
+        </p:nvSpPr>
+        <p:spPr>
+          <a:xfrm>
+            <a:off x="5669280" y="1534004"/>
+            <a:ext cx="3200400" cy="3220876"/>
+          </a:xfrm>
+          <a:custGeom>
+            <a:avLst/>
+            <a:gdLst/>
+            <a:ahLst/>
+            <a:cxnLst/>
+            <a:rect l="l" t="t" r="r" b="b"/>
+            <a:pathLst>
+              <a:path w="3200400" h="3220876">
+                <a:moveTo>
+                  <a:pt x="0" y="3220876"/>
+                </a:moveTo>
+                <a:lnTo>
+                  <a:pt x="32327" y="3220872"/>
+                </a:lnTo>
+                <a:lnTo>
+                  <a:pt x="64654" y="3220849"/>
+                </a:lnTo>
+                <a:lnTo>
+                  <a:pt x="96981" y="3220786"/>
+                </a:lnTo>
+                <a:lnTo>
+                  <a:pt x="129309" y="3220663"/>
+                </a:lnTo>
+                <a:lnTo>
+                  <a:pt x="161636" y="3220461"/>
+                </a:lnTo>
+                <a:lnTo>
+                  <a:pt x="193963" y="3220158"/>
+                </a:lnTo>
+                <a:lnTo>
+                  <a:pt x="226290" y="3219737"/>
+                </a:lnTo>
+                <a:lnTo>
+                  <a:pt x="258618" y="3219176"/>
+                </a:lnTo>
+                <a:lnTo>
+                  <a:pt x="290945" y="3218456"/>
+                </a:lnTo>
+                <a:lnTo>
+                  <a:pt x="323272" y="3217556"/>
+                </a:lnTo>
+                <a:lnTo>
+                  <a:pt x="355600" y="3216457"/>
+                </a:lnTo>
+                <a:lnTo>
+                  <a:pt x="387927" y="3215139"/>
+                </a:lnTo>
+                <a:lnTo>
+                  <a:pt x="420254" y="3213583"/>
+                </a:lnTo>
+                <a:lnTo>
+                  <a:pt x="452581" y="3211767"/>
+                </a:lnTo>
+                <a:lnTo>
+                  <a:pt x="484909" y="3209672"/>
+                </a:lnTo>
+                <a:lnTo>
+                  <a:pt x="517236" y="3207279"/>
+                </a:lnTo>
+                <a:lnTo>
+                  <a:pt x="549563" y="3204567"/>
+                </a:lnTo>
+                <a:lnTo>
+                  <a:pt x="581890" y="3201516"/>
+                </a:lnTo>
+                <a:lnTo>
+                  <a:pt x="614218" y="3198107"/>
+                </a:lnTo>
+                <a:lnTo>
+                  <a:pt x="646545" y="3194320"/>
+                </a:lnTo>
+                <a:lnTo>
+                  <a:pt x="678872" y="3190134"/>
+                </a:lnTo>
+                <a:lnTo>
+                  <a:pt x="711200" y="3185530"/>
+                </a:lnTo>
+                <a:lnTo>
+                  <a:pt x="743527" y="3180488"/>
+                </a:lnTo>
+                <a:lnTo>
+                  <a:pt x="775854" y="3174987"/>
+                </a:lnTo>
+                <a:lnTo>
+                  <a:pt x="808181" y="3169009"/>
+                </a:lnTo>
+                <a:lnTo>
+                  <a:pt x="840509" y="3162533"/>
+                </a:lnTo>
+                <a:lnTo>
+                  <a:pt x="872836" y="3155538"/>
+                </a:lnTo>
+                <a:lnTo>
+                  <a:pt x="905163" y="3148007"/>
+                </a:lnTo>
+                <a:lnTo>
+                  <a:pt x="937490" y="3139917"/>
+                </a:lnTo>
+                <a:lnTo>
+                  <a:pt x="969818" y="3131250"/>
+                </a:lnTo>
+                <a:lnTo>
+                  <a:pt x="1002145" y="3121985"/>
+                </a:lnTo>
+                <a:lnTo>
+                  <a:pt x="1034472" y="3112103"/>
+                </a:lnTo>
+                <a:lnTo>
+                  <a:pt x="1066800" y="3101584"/>
+                </a:lnTo>
+                <a:lnTo>
+                  <a:pt x="1099127" y="3090407"/>
+                </a:lnTo>
+                <a:lnTo>
+                  <a:pt x="1131454" y="3078553"/>
+                </a:lnTo>
+                <a:lnTo>
+                  <a:pt x="1163781" y="3066002"/>
+                </a:lnTo>
+                <a:lnTo>
+                  <a:pt x="1196109" y="3052735"/>
+                </a:lnTo>
+                <a:lnTo>
+                  <a:pt x="1228436" y="3038730"/>
+                </a:lnTo>
+                <a:lnTo>
+                  <a:pt x="1260763" y="3023968"/>
+                </a:lnTo>
+                <a:lnTo>
+                  <a:pt x="1293090" y="3008430"/>
+                </a:lnTo>
+                <a:lnTo>
+                  <a:pt x="1325418" y="2992095"/>
+                </a:lnTo>
+                <a:lnTo>
+                  <a:pt x="1357745" y="2974943"/>
+                </a:lnTo>
+                <a:lnTo>
+                  <a:pt x="1390072" y="2956955"/>
+                </a:lnTo>
+                <a:lnTo>
+                  <a:pt x="1422400" y="2938110"/>
+                </a:lnTo>
+                <a:lnTo>
+                  <a:pt x="1454727" y="2918389"/>
+                </a:lnTo>
+                <a:lnTo>
+                  <a:pt x="1487054" y="2897772"/>
+                </a:lnTo>
+                <a:lnTo>
+                  <a:pt x="1519381" y="2876239"/>
+                </a:lnTo>
+                <a:lnTo>
+                  <a:pt x="1551709" y="2853769"/>
+                </a:lnTo>
+                <a:lnTo>
+                  <a:pt x="1584036" y="2830344"/>
+                </a:lnTo>
+                <a:lnTo>
+                  <a:pt x="1616363" y="2805942"/>
+                </a:lnTo>
+                <a:lnTo>
+                  <a:pt x="1648690" y="2780545"/>
+                </a:lnTo>
+                <a:lnTo>
+                  <a:pt x="1681018" y="2754132"/>
+                </a:lnTo>
+                <a:lnTo>
+                  <a:pt x="1713345" y="2726683"/>
+                </a:lnTo>
+                <a:lnTo>
+                  <a:pt x="1745672" y="2698179"/>
+                </a:lnTo>
+                <a:lnTo>
+                  <a:pt x="1778000" y="2668599"/>
+                </a:lnTo>
+                <a:lnTo>
+                  <a:pt x="1810327" y="2637924"/>
+                </a:lnTo>
+                <a:lnTo>
+                  <a:pt x="1842654" y="2606134"/>
+                </a:lnTo>
+                <a:lnTo>
+                  <a:pt x="1874981" y="2573208"/>
+                </a:lnTo>
+                <a:lnTo>
+                  <a:pt x="1907309" y="2539127"/>
+                </a:lnTo>
+                <a:lnTo>
+                  <a:pt x="1939636" y="2503871"/>
+                </a:lnTo>
+                <a:lnTo>
+                  <a:pt x="1971963" y="2467420"/>
+                </a:lnTo>
+                <a:lnTo>
+                  <a:pt x="2004290" y="2429754"/>
+                </a:lnTo>
+                <a:lnTo>
+                  <a:pt x="2036618" y="2390853"/>
+                </a:lnTo>
+                <a:lnTo>
+                  <a:pt x="2068945" y="2350697"/>
+                </a:lnTo>
+                <a:lnTo>
+                  <a:pt x="2101272" y="2309267"/>
+                </a:lnTo>
+                <a:lnTo>
+                  <a:pt x="2133600" y="2266542"/>
+                </a:lnTo>
+                <a:lnTo>
+                  <a:pt x="2165927" y="2222503"/>
+                </a:lnTo>
+                <a:lnTo>
+                  <a:pt x="2198254" y="2177129"/>
+                </a:lnTo>
+                <a:lnTo>
+                  <a:pt x="2230581" y="2130401"/>
+                </a:lnTo>
+                <a:lnTo>
+                  <a:pt x="2262909" y="2082298"/>
+                </a:lnTo>
+                <a:lnTo>
+                  <a:pt x="2295236" y="2032802"/>
+                </a:lnTo>
+                <a:lnTo>
+                  <a:pt x="2327563" y="1981891"/>
+                </a:lnTo>
+                <a:lnTo>
+                  <a:pt x="2359890" y="1929547"/>
+                </a:lnTo>
+                <a:lnTo>
+                  <a:pt x="2392218" y="1875748"/>
+                </a:lnTo>
+                <a:lnTo>
+                  <a:pt x="2424545" y="1820476"/>
+                </a:lnTo>
+                <a:lnTo>
+                  <a:pt x="2456872" y="1763709"/>
+                </a:lnTo>
+                <a:lnTo>
+                  <a:pt x="2489200" y="1705429"/>
+                </a:lnTo>
+                <a:lnTo>
+                  <a:pt x="2521527" y="1645616"/>
+                </a:lnTo>
+                <a:lnTo>
+                  <a:pt x="2553854" y="1584249"/>
+                </a:lnTo>
+                <a:lnTo>
+                  <a:pt x="2586181" y="1521309"/>
+                </a:lnTo>
+                <a:lnTo>
+                  <a:pt x="2618509" y="1456775"/>
+                </a:lnTo>
+                <a:lnTo>
+                  <a:pt x="2650836" y="1390628"/>
+                </a:lnTo>
+                <a:lnTo>
+                  <a:pt x="2683163" y="1322848"/>
+                </a:lnTo>
+                <a:lnTo>
+                  <a:pt x="2715490" y="1253414"/>
+                </a:lnTo>
+                <a:lnTo>
+                  <a:pt x="2747818" y="1182308"/>
+                </a:lnTo>
+                <a:lnTo>
+                  <a:pt x="2780145" y="1109509"/>
+                </a:lnTo>
+                <a:lnTo>
+                  <a:pt x="2812472" y="1034997"/>
+                </a:lnTo>
+                <a:lnTo>
+                  <a:pt x="2844800" y="958752"/>
+                </a:lnTo>
+                <a:lnTo>
+                  <a:pt x="2877127" y="880755"/>
+                </a:lnTo>
+                <a:lnTo>
+                  <a:pt x="2909454" y="800984"/>
+                </a:lnTo>
+                <a:lnTo>
+                  <a:pt x="2941781" y="719422"/>
+                </a:lnTo>
+                <a:lnTo>
+                  <a:pt x="2974109" y="636047"/>
+                </a:lnTo>
+                <a:lnTo>
+                  <a:pt x="3006436" y="550839"/>
+                </a:lnTo>
+                <a:lnTo>
+                  <a:pt x="3038763" y="463780"/>
+                </a:lnTo>
+                <a:lnTo>
+                  <a:pt x="3071090" y="374848"/>
+                </a:lnTo>
+                <a:lnTo>
+                  <a:pt x="3103418" y="284024"/>
+                </a:lnTo>
+                <a:lnTo>
+                  <a:pt x="3135745" y="191288"/>
+                </a:lnTo>
+                <a:lnTo>
+                  <a:pt x="3168072" y="96620"/>
+                </a:lnTo>
+                <a:lnTo>
+                  <a:pt x="3200400" y="0"/>
+                </a:lnTo>
+              </a:path>
+            </a:pathLst>
+          </a:custGeom>
+          <a:noFill/>
+          <a:ln w="38100">
+            <a:solidFill>
+              <a:srgbClr val="8EDBD4"/>
+            </a:solidFill>
+          </a:ln>
+          <a:effectLst/>
+        </p:spPr>
+        <p:txBody>
+          <a:bodyPr rtlCol="0" anchor="ctr"/>
+          <a:lstStyle/>
+          <a:p>
+            <a:pPr algn="ctr"/>
+          </a:p>
+        </p:txBody>
+      </p:sp>
+      <p:sp>
+        <p:nvSpPr>
+          <p:cNvPr id="65" name="C3-E12 ellipse 63" descr="sci-ppt:o063"/>
+          <p:cNvSpPr/>
+          <p:nvPr/>
+        </p:nvSpPr>
+        <p:spPr>
+          <a:xfrm>
+            <a:off x="6254496" y="4674248"/>
+            <a:ext cx="109728" cy="109728"/>
+          </a:xfrm>
+          <a:prstGeom prst="ellipse">
+            <a:avLst/>
+          </a:prstGeom>
+          <a:solidFill>
+            <a:srgbClr val="F2B880"/>
+          </a:solidFill>
+          <a:ln w="12700">
+            <a:solidFill>
+              <a:srgbClr val="F2B880"/>
+            </a:solidFill>
+          </a:ln>
+          <a:effectLst/>
+        </p:spPr>
+        <p:txBody>
+          <a:bodyPr rtlCol="0" anchor="ctr"/>
+          <a:lstStyle/>
+          <a:p>
+            <a:pPr algn="ctr"/>
+          </a:p>
+        </p:txBody>
+      </p:sp>
+      <p:sp>
+        <p:nvSpPr>
+          <p:cNvPr id="66" name="C3-E12 text 64" descr="sci-ppt:o064"/>
+          <p:cNvSpPr txBox="1"/>
+          <p:nvPr/>
+        </p:nvSpPr>
+        <p:spPr>
+          <a:xfrm>
+            <a:off x="6382512" y="4363352"/>
+            <a:ext cx="822960" cy="216153"/>
+          </a:xfrm>
+          <a:prstGeom prst="rect">
+            <a:avLst/>
+          </a:prstGeom>
+          <a:noFill/>
+          <a:effectLst/>
+        </p:spPr>
+        <p:txBody>
+          <a:bodyPr wrap="none" lIns="18288" rIns="18288" tIns="18288" bIns="18288" anchor="t">
+            <a:spAutoFit/>
+          </a:bodyPr>
+          <a:lstStyle/>
+          <a:p>
+            <a:pPr algn="l">
+              <a:spcAft>
+                <a:spcPts val="0"/>
+              </a:spcAft>
+            </a:pPr>
+            <a:r>
+              <a:rPr sz="1100" b="0" i="0">
+                <a:solidFill>
+                  <a:srgbClr val="F2B880"/>
+                </a:solidFill>
+                <a:latin typeface="Arial"/>
+              </a:rPr>
+              <a:t>0.004</a:t>
+            </a:r>
+          </a:p>
+        </p:txBody>
+      </p:sp>
+      <p:sp>
+        <p:nvSpPr>
+          <p:cNvPr id="67" name="C3-E12 ellipse 65" descr="sci-ppt:o065"/>
+          <p:cNvSpPr/>
+          <p:nvPr/>
+        </p:nvSpPr>
+        <p:spPr>
+          <a:xfrm>
+            <a:off x="6894576" y="4493879"/>
+            <a:ext cx="109728" cy="109728"/>
+          </a:xfrm>
+          <a:prstGeom prst="ellipse">
+            <a:avLst/>
+          </a:prstGeom>
+          <a:solidFill>
+            <a:srgbClr val="F28BA0"/>
+          </a:solidFill>
+          <a:ln w="12700">
+            <a:solidFill>
+              <a:srgbClr val="F28BA0"/>
+            </a:solidFill>
+          </a:ln>
+          <a:effectLst/>
+        </p:spPr>
+        <p:txBody>
+          <a:bodyPr rtlCol="0" anchor="ctr"/>
+          <a:lstStyle/>
+          <a:p>
+            <a:pPr algn="ctr"/>
+          </a:p>
+        </p:txBody>
+      </p:sp>
+      <p:sp>
+        <p:nvSpPr>
+          <p:cNvPr id="68" name="C3-E12 text 66" descr="sci-ppt:o066"/>
+          <p:cNvSpPr txBox="1"/>
+          <p:nvPr/>
+        </p:nvSpPr>
+        <p:spPr>
+          <a:xfrm>
+            <a:off x="7022592" y="4182983"/>
+            <a:ext cx="822960" cy="216153"/>
+          </a:xfrm>
+          <a:prstGeom prst="rect">
+            <a:avLst/>
+          </a:prstGeom>
+          <a:noFill/>
+          <a:effectLst/>
+        </p:spPr>
+        <p:txBody>
+          <a:bodyPr wrap="none" lIns="18288" rIns="18288" tIns="18288" bIns="18288" anchor="t">
+            <a:spAutoFit/>
+          </a:bodyPr>
+          <a:lstStyle/>
+          <a:p>
+            <a:pPr algn="l">
+              <a:spcAft>
+                <a:spcPts val="0"/>
+              </a:spcAft>
+            </a:pPr>
+            <a:r>
+              <a:rPr sz="1100" b="0" i="0">
+                <a:solidFill>
+                  <a:srgbClr val="F28BA0"/>
+                </a:solidFill>
+                <a:latin typeface="Arial"/>
+              </a:rPr>
+              <a:t>0.034</a:t>
+            </a:r>
+          </a:p>
+        </p:txBody>
+      </p:sp>
+      <p:sp>
+        <p:nvSpPr>
+          <p:cNvPr id="69" name="C3-E12 ellipse 67" descr="sci-ppt:o067"/>
+          <p:cNvSpPr/>
+          <p:nvPr/>
+        </p:nvSpPr>
+        <p:spPr>
+          <a:xfrm>
+            <a:off x="7534656" y="4004306"/>
+            <a:ext cx="109728" cy="109728"/>
+          </a:xfrm>
+          <a:prstGeom prst="ellipse">
+            <a:avLst/>
+          </a:prstGeom>
+          <a:solidFill>
+            <a:srgbClr val="7FC8F8"/>
+          </a:solidFill>
+          <a:ln w="12700">
+            <a:solidFill>
+              <a:srgbClr val="7FC8F8"/>
+            </a:solidFill>
+          </a:ln>
+          <a:effectLst/>
+        </p:spPr>
+        <p:txBody>
+          <a:bodyPr rtlCol="0" anchor="ctr"/>
+          <a:lstStyle/>
+          <a:p>
+            <a:pPr algn="ctr"/>
+          </a:p>
+        </p:txBody>
+      </p:sp>
+      <p:sp>
+        <p:nvSpPr>
+          <p:cNvPr id="70" name="C3-E12 text 68" descr="sci-ppt:o068"/>
+          <p:cNvSpPr txBox="1"/>
+          <p:nvPr/>
+        </p:nvSpPr>
+        <p:spPr>
+          <a:xfrm>
+            <a:off x="7662672" y="3693410"/>
+            <a:ext cx="822960" cy="216153"/>
+          </a:xfrm>
+          <a:prstGeom prst="rect">
+            <a:avLst/>
+          </a:prstGeom>
+          <a:noFill/>
+          <a:effectLst/>
+        </p:spPr>
+        <p:txBody>
+          <a:bodyPr wrap="none" lIns="18288" rIns="18288" tIns="18288" bIns="18288" anchor="t">
+            <a:spAutoFit/>
+          </a:bodyPr>
+          <a:lstStyle/>
+          <a:p>
+            <a:pPr algn="l">
+              <a:spcAft>
+                <a:spcPts val="0"/>
+              </a:spcAft>
+            </a:pPr>
+            <a:r>
+              <a:rPr sz="1100" b="0" i="0">
+                <a:solidFill>
+                  <a:srgbClr val="7FC8F8"/>
+                </a:solidFill>
+                <a:latin typeface="Arial"/>
+              </a:rPr>
+              <a:t>0.113</a:t>
+            </a:r>
+          </a:p>
+        </p:txBody>
+      </p:sp>
+      <p:sp>
+        <p:nvSpPr>
+          <p:cNvPr id="71" name="C3-E12 round_rect 69" descr="sci-ppt:o069"/>
+          <p:cNvSpPr/>
+          <p:nvPr/>
+        </p:nvSpPr>
+        <p:spPr>
+          <a:xfrm>
+            <a:off x="9052560" y="1371600"/>
+            <a:ext cx="2788920" cy="3383280"/>
+          </a:xfrm>
+          <a:prstGeom prst="roundRect">
+            <a:avLst/>
+          </a:prstGeom>
+          <a:solidFill>
+            <a:srgbClr val="213E4B"/>
+          </a:solidFill>
+          <a:ln w="20320">
+            <a:solidFill>
+              <a:srgbClr val="F2B880"/>
+            </a:solidFill>
+          </a:ln>
+          <a:effectLst/>
+        </p:spPr>
+        <p:txBody>
+          <a:bodyPr rtlCol="0" anchor="ctr"/>
+          <a:lstStyle/>
+          <a:p>
+            <a:pPr algn="ctr"/>
+          </a:p>
+        </p:txBody>
+      </p:sp>
+      <p:sp>
+        <p:nvSpPr>
+          <p:cNvPr id="72" name="C3-E12 text 70" descr="sci-ppt:o070"/>
+          <p:cNvSpPr txBox="1"/>
+          <p:nvPr/>
+        </p:nvSpPr>
+        <p:spPr>
+          <a:xfrm>
+            <a:off x="9162288" y="1426464"/>
+            <a:ext cx="2569463" cy="247142"/>
+          </a:xfrm>
+          <a:prstGeom prst="rect">
+            <a:avLst/>
+          </a:prstGeom>
+          <a:noFill/>
+          <a:effectLst/>
+        </p:spPr>
+        <p:txBody>
+          <a:bodyPr wrap="none" lIns="18288" rIns="18288" tIns="18288" bIns="18288" anchor="t">
+            <a:spAutoFit/>
+          </a:bodyPr>
+          <a:lstStyle/>
+          <a:p>
+            <a:pPr algn="l">
+              <a:spcAft>
+                <a:spcPts val="0"/>
+              </a:spcAft>
+            </a:pPr>
+            <a:r>
+              <a:rPr sz="1300" b="1" i="0">
+                <a:solidFill>
+                  <a:srgbClr val="F2B880"/>
+                </a:solidFill>
+                <a:latin typeface="Arial"/>
+              </a:rPr>
+              <a:t>Delay rᵢ/c</a:t>
+            </a:r>
+          </a:p>
+        </p:txBody>
+      </p:sp>
+      <p:sp>
+        <p:nvSpPr>
+          <p:cNvPr id="73" name="C3-E12 ellipse 71" descr="sci-ppt:o071"/>
+          <p:cNvSpPr/>
+          <p:nvPr/>
+        </p:nvSpPr>
+        <p:spPr>
+          <a:xfrm>
+            <a:off x="9326880" y="2651760"/>
+            <a:ext cx="182880" cy="182880"/>
+          </a:xfrm>
+          <a:prstGeom prst="ellipse">
+            <a:avLst/>
+          </a:prstGeom>
+          <a:solidFill>
+            <a:srgbClr val="F2B880"/>
+          </a:solidFill>
+          <a:ln w="12700">
+            <a:solidFill>
+              <a:srgbClr val="F2B880"/>
+            </a:solidFill>
+          </a:ln>
+          <a:effectLst/>
+        </p:spPr>
+        <p:txBody>
+          <a:bodyPr rtlCol="0" anchor="ctr"/>
+          <a:lstStyle/>
+          <a:p>
+            <a:pPr algn="ctr"/>
+          </a:p>
+        </p:txBody>
+      </p:sp>
+      <p:sp>
+        <p:nvSpPr>
+          <p:cNvPr id="74" name="C3-E12 text 72" descr="sci-ppt:o072"/>
+          <p:cNvSpPr txBox="1"/>
+          <p:nvPr/>
+        </p:nvSpPr>
+        <p:spPr>
+          <a:xfrm>
+            <a:off x="9235440" y="2011680"/>
+            <a:ext cx="2468880" cy="223900"/>
+          </a:xfrm>
+          <a:prstGeom prst="rect">
+            <a:avLst/>
+          </a:prstGeom>
+          <a:noFill/>
+          <a:effectLst/>
+        </p:spPr>
+        <p:txBody>
+          <a:bodyPr wrap="none" lIns="18288" rIns="18288" tIns="18288" bIns="18288" anchor="t">
+            <a:spAutoFit/>
+          </a:bodyPr>
+          <a:lstStyle/>
+          <a:p>
+            <a:pPr algn="l">
+              <a:spcAft>
+                <a:spcPts val="0"/>
+              </a:spcAft>
+            </a:pPr>
+            <a:r>
+              <a:rPr sz="1150" b="1" i="0">
+                <a:solidFill>
+                  <a:srgbClr val="F2B880"/>
+                </a:solidFill>
+                <a:latin typeface="Arial"/>
+              </a:rPr>
+              <a:t>source i</a:t>
+            </a:r>
+          </a:p>
+        </p:txBody>
+      </p:sp>
+      <p:cxnSp>
+        <p:nvCxnSpPr>
+          <p:cNvPr id="75" name="C3-E12 arrow 73" descr="sci-ppt:o073"/>
+          <p:cNvCxnSpPr/>
+          <p:nvPr/>
+        </p:nvCxnSpPr>
+        <p:spPr>
+          <a:xfrm>
+            <a:off x="9509760" y="2743200"/>
+            <a:ext cx="1828800" cy="0"/>
+          </a:xfrm>
+          <a:prstGeom prst="line">
+            <a:avLst/>
+          </a:prstGeom>
+          <a:ln w="31750">
             <a:solidFill>
               <a:srgbClr val="8EDBD4"/>
             </a:solidFill>
@@ -3194,24 +5676,24 @@
       </p:cxnSp>
       <p:sp>
         <p:nvSpPr>
-          <p:cNvPr id="5" name="C3-E12 ellipse 3" descr="sci-ppt:o003"/>
+          <p:cNvPr id="76" name="C3-E12 ellipse 74" descr="sci-ppt:o074"/>
           <p:cNvSpPr/>
           <p:nvPr/>
         </p:nvSpPr>
         <p:spPr>
           <a:xfrm>
-            <a:off x="1993392" y="2267712"/>
-            <a:ext cx="585216" cy="585216"/>
+            <a:off x="11439144" y="2660904"/>
+            <a:ext cx="164592" cy="164592"/>
           </a:xfrm>
           <a:prstGeom prst="ellipse">
             <a:avLst/>
           </a:prstGeom>
           <a:solidFill>
-            <a:srgbClr val="213E4B"/>
+            <a:srgbClr val="F28BA0"/>
           </a:solidFill>
-          <a:ln w="19050">
+          <a:ln w="12700">
             <a:solidFill>
-              <a:srgbClr val="B4C7D2"/>
+              <a:srgbClr val="F28BA0"/>
             </a:solidFill>
           </a:ln>
           <a:effectLst/>
@@ -3224,128 +5706,16 @@
           </a:p>
         </p:txBody>
       </p:sp>
-      <p:cxnSp>
-        <p:nvCxnSpPr>
-          <p:cNvPr id="6" name="C3-E12 arrow 4" descr="sci-ppt:o004"/>
-          <p:cNvCxnSpPr/>
-          <p:nvPr/>
-        </p:nvCxnSpPr>
-        <p:spPr>
-          <a:xfrm flipV="1">
-            <a:off x="2606040" y="2011680"/>
-            <a:ext cx="5897880" cy="548640"/>
-          </a:xfrm>
-          <a:prstGeom prst="line">
-            <a:avLst/>
-          </a:prstGeom>
-          <a:ln w="25400">
-            <a:solidFill>
-              <a:srgbClr val="8EDBD4"/>
-            </a:solidFill>
-            <a:headEnd type="none" w="med" len="med"/>
-            <a:tailEnd type="triangle" w="med" len="med"/>
-          </a:ln>
-          <a:effectLst/>
-        </p:spPr>
-      </p:cxnSp>
-      <p:sp>
-        <p:nvSpPr>
-          <p:cNvPr id="7" name="C3-E12 ellipse 5" descr="sci-ppt:o005"/>
-          <p:cNvSpPr/>
-          <p:nvPr/>
-        </p:nvSpPr>
-        <p:spPr>
-          <a:xfrm>
-            <a:off x="2999232" y="1078992"/>
-            <a:ext cx="585216" cy="585216"/>
-          </a:xfrm>
-          <a:prstGeom prst="ellipse">
-            <a:avLst/>
-          </a:prstGeom>
-          <a:solidFill>
-            <a:srgbClr val="213E4B"/>
-          </a:solidFill>
-          <a:ln w="19050">
-            <a:solidFill>
-              <a:srgbClr val="B4C7D2"/>
-            </a:solidFill>
-          </a:ln>
-          <a:effectLst/>
-        </p:spPr>
-        <p:txBody>
-          <a:bodyPr rtlCol="0" anchor="ctr"/>
-          <a:lstStyle/>
-          <a:p>
-            <a:pPr algn="ctr"/>
-          </a:p>
-        </p:txBody>
-      </p:sp>
-      <p:cxnSp>
-        <p:nvCxnSpPr>
-          <p:cNvPr id="8" name="C3-E12 arrow 6" descr="sci-ppt:o006"/>
-          <p:cNvCxnSpPr/>
-          <p:nvPr/>
-        </p:nvCxnSpPr>
-        <p:spPr>
-          <a:xfrm>
-            <a:off x="3611880" y="1371600"/>
-            <a:ext cx="4892040" cy="640080"/>
-          </a:xfrm>
-          <a:prstGeom prst="line">
-            <a:avLst/>
-          </a:prstGeom>
-          <a:ln w="25400">
-            <a:solidFill>
-              <a:srgbClr val="8EDBD4"/>
-            </a:solidFill>
-            <a:headEnd type="none" w="med" len="med"/>
-            <a:tailEnd type="triangle" w="med" len="med"/>
-          </a:ln>
-          <a:effectLst/>
-        </p:spPr>
-      </p:cxnSp>
-      <p:sp>
-        <p:nvSpPr>
-          <p:cNvPr id="9" name="C3-E12 ellipse 7" descr="sci-ppt:o007"/>
-          <p:cNvSpPr/>
-          <p:nvPr/>
-        </p:nvSpPr>
-        <p:spPr>
-          <a:xfrm>
-            <a:off x="8577072" y="1901952"/>
-            <a:ext cx="219456" cy="219456"/>
-          </a:xfrm>
-          <a:prstGeom prst="ellipse">
-            <a:avLst/>
-          </a:prstGeom>
-          <a:solidFill>
-            <a:srgbClr val="8EDBD4"/>
-          </a:solidFill>
-          <a:ln w="19050">
-            <a:solidFill>
-              <a:srgbClr val="B4C7D2"/>
-            </a:solidFill>
-          </a:ln>
-          <a:effectLst/>
-        </p:spPr>
-        <p:txBody>
-          <a:bodyPr rtlCol="0" anchor="ctr"/>
-          <a:lstStyle/>
-          <a:p>
-            <a:pPr algn="ctr"/>
-          </a:p>
-        </p:txBody>
-      </p:sp>
-      <p:sp>
-        <p:nvSpPr>
-          <p:cNvPr id="10" name="C3-E12 text 8" descr="sci-ppt:o008"/>
+      <p:sp>
+        <p:nvSpPr>
+          <p:cNvPr id="77" name="C3-E12 text 75" descr="sci-ppt:o075"/>
           <p:cNvSpPr txBox="1"/>
           <p:nvPr/>
         </p:nvSpPr>
         <p:spPr>
           <a:xfrm>
-            <a:off x="8046720" y="2377440"/>
-            <a:ext cx="2743200" cy="365760"/>
+            <a:off x="10972800" y="2926080"/>
+            <a:ext cx="914400" cy="231648"/>
           </a:xfrm>
           <a:prstGeom prst="rect">
             <a:avLst/>
@@ -3354,7 +5724,7 @@
           <a:effectLst/>
         </p:spPr>
         <p:txBody>
-          <a:bodyPr wrap="square" lIns="27432" rIns="27432" tIns="18288" bIns="18288" anchor="ctr">
+          <a:bodyPr wrap="none" lIns="18288" rIns="18288" tIns="18288" bIns="18288" anchor="t">
             <a:spAutoFit/>
           </a:bodyPr>
           <a:lstStyle/>
@@ -3365,39 +5735,55 @@
               </a:spcAft>
             </a:pPr>
             <a:r>
-              <a:rPr sz="1700" b="0" i="0">
+              <a:rPr sz="1200" b="1" i="0">
+                <a:solidFill>
+                  <a:srgbClr val="F28BA0"/>
+                </a:solidFill>
+                <a:latin typeface="Arial"/>
+              </a:rPr>
+              <a:t>x</a:t>
+            </a:r>
+          </a:p>
+        </p:txBody>
+      </p:sp>
+      <p:sp>
+        <p:nvSpPr>
+          <p:cNvPr id="78" name="C3-E12 text 76" descr="sci-ppt:o076"/>
+          <p:cNvSpPr txBox="1"/>
+          <p:nvPr/>
+        </p:nvSpPr>
+        <p:spPr>
+          <a:xfrm>
+            <a:off x="9144000" y="3246120"/>
+            <a:ext cx="2651760" cy="386588"/>
+          </a:xfrm>
+          <a:prstGeom prst="rect">
+            <a:avLst/>
+          </a:prstGeom>
+          <a:noFill/>
+          <a:effectLst/>
+        </p:spPr>
+        <p:txBody>
+          <a:bodyPr wrap="none" lIns="18288" rIns="18288" tIns="18288" bIns="18288" anchor="t">
+            <a:spAutoFit/>
+          </a:bodyPr>
+          <a:lstStyle/>
+          <a:p>
+            <a:pPr algn="l">
+              <a:spcAft>
+                <a:spcPts val="0"/>
+              </a:spcAft>
+            </a:pPr>
+            <a:r>
+              <a:rPr sz="1100" b="0" i="0">
                 <a:solidFill>
                   <a:srgbClr val="E7F0F3"/>
                 </a:solidFill>
                 <a:latin typeface="Arial"/>
               </a:rPr>
-              <a:t>Observation x, time t</a:t>
-            </a:r>
-          </a:p>
-        </p:txBody>
-      </p:sp>
-      <p:sp>
-        <p:nvSpPr>
-          <p:cNvPr id="11" name="C3-E12 text 9" descr="sci-ppt:o009"/>
-          <p:cNvSpPr txBox="1"/>
-          <p:nvPr/>
-        </p:nvSpPr>
-        <p:spPr>
-          <a:xfrm>
-            <a:off x="4389120" y="914400"/>
-            <a:ext cx="4572000" cy="365760"/>
-          </a:xfrm>
-          <a:prstGeom prst="rect">
-            <a:avLst/>
-          </a:prstGeom>
-          <a:noFill/>
-          <a:effectLst/>
-        </p:spPr>
-        <p:txBody>
-          <a:bodyPr wrap="square" lIns="27432" rIns="27432" tIns="18288" bIns="18288" anchor="ctr">
-            <a:spAutoFit/>
-          </a:bodyPr>
-          <a:lstStyle/>
+              <a:t>the signal at x now was emitted at</a:t>
+            </a:r>
+          </a:p>
           <a:p>
             <a:pPr algn="l">
               <a:spcAft>
@@ -3405,27 +5791,27 @@
               </a:spcAft>
             </a:pPr>
             <a:r>
-              <a:rPr sz="1900" b="0" i="0">
+              <a:rPr sz="1100" b="0" i="0">
                 <a:solidFill>
                   <a:srgbClr val="E7F0F3"/>
                 </a:solidFill>
                 <a:latin typeface="Arial"/>
               </a:rPr>
-              <a:t>Retarded source time: t − r_i/c</a:t>
-            </a:r>
-          </a:p>
-        </p:txBody>
-      </p:sp>
-      <p:sp>
-        <p:nvSpPr>
-          <p:cNvPr id="12" name="C3-E12 text 10" descr="sci-ppt:o010"/>
+              <a:t>t − rᵢ/c</a:t>
+            </a:r>
+          </a:p>
+        </p:txBody>
+      </p:sp>
+      <p:sp>
+        <p:nvSpPr>
+          <p:cNvPr id="79" name="C3-E12 text 77" descr="sci-ppt:o077"/>
           <p:cNvSpPr txBox="1"/>
           <p:nvPr/>
         </p:nvSpPr>
         <p:spPr>
           <a:xfrm>
-            <a:off x="731520" y="3383280"/>
-            <a:ext cx="10789920" cy="365760"/>
+            <a:off x="5669280" y="5303520"/>
+            <a:ext cx="6126480" cy="231648"/>
           </a:xfrm>
           <a:prstGeom prst="rect">
             <a:avLst/>
@@ -3434,7 +5820,7 @@
           <a:effectLst/>
         </p:spPr>
         <p:txBody>
-          <a:bodyPr wrap="square" lIns="27432" rIns="27432" tIns="18288" bIns="18288" anchor="ctr">
+          <a:bodyPr wrap="none" lIns="18288" rIns="18288" tIns="18288" bIns="18288" anchor="t">
             <a:spAutoFit/>
           </a:bodyPr>
           <a:lstStyle/>
@@ -3445,49 +5831,27 @@
               </a:spcAft>
             </a:pPr>
             <a:r>
-              <a:rPr sz="1700" b="0" i="0">
+              <a:rPr sz="1200" b="1" i="0">
                 <a:solidFill>
                   <a:srgbClr val="E7F0F3"/>
                 </a:solidFill>
                 <a:latin typeface="Arial"/>
               </a:rPr>
-              <a:t>Volume fraction requires a defined region; travel times govern pulse overlap.</a:t>
-            </a:r>
-          </a:p>
-        </p:txBody>
-      </p:sp>
-      <p:cxnSp>
-        <p:nvCxnSpPr>
-          <p:cNvPr id="13" name="C3-E12 line 11" descr="sci-ppt:o011"/>
-          <p:cNvCxnSpPr/>
-          <p:nvPr/>
-        </p:nvCxnSpPr>
-        <p:spPr>
-          <a:xfrm>
-            <a:off x="274320" y="3977639"/>
-            <a:ext cx="11612880" cy="0"/>
-          </a:xfrm>
-          <a:prstGeom prst="line">
-            <a:avLst/>
-          </a:prstGeom>
-          <a:ln w="12700">
-            <a:solidFill>
-              <a:srgbClr val="405967"/>
-            </a:solidFill>
-          </a:ln>
-          <a:effectLst/>
-        </p:spPr>
-      </p:cxnSp>
-      <p:sp>
-        <p:nvSpPr>
-          <p:cNvPr id="14" name="C3-E12 text 12" descr="sci-ppt:o012"/>
+              <a:t>φ(x,t) ≃ −Σ V̇ᵢ(t − rᵢ/c) / (4π rᵢ),   p′ ≃ Σ ρ V̈ᵢ(t − rᵢ/c) / (4π rᵢ)</a:t>
+            </a:r>
+          </a:p>
+        </p:txBody>
+      </p:sp>
+      <p:sp>
+        <p:nvSpPr>
+          <p:cNvPr id="80" name="C3-E12 text 78" descr="sci-ppt:o078"/>
           <p:cNvSpPr txBox="1"/>
           <p:nvPr/>
         </p:nvSpPr>
         <p:spPr>
           <a:xfrm>
-            <a:off x="320040" y="4096512"/>
-            <a:ext cx="5715000" cy="246888"/>
+            <a:off x="5669280" y="5760720"/>
+            <a:ext cx="6126480" cy="433070"/>
           </a:xfrm>
           <a:prstGeom prst="rect">
             <a:avLst/>
@@ -3496,7 +5860,7 @@
           <a:effectLst/>
         </p:spPr>
         <p:txBody>
-          <a:bodyPr wrap="square" lIns="27432" rIns="27432" tIns="18288" bIns="18288" anchor="ctr">
+          <a:bodyPr wrap="none" lIns="18288" rIns="18288" tIns="18288" bIns="18288" anchor="t">
             <a:spAutoFit/>
           </a:bodyPr>
           <a:lstStyle/>
@@ -3507,39 +5871,15 @@
               </a:spcAft>
             </a:pPr>
             <a:r>
-              <a:rPr sz="1150" b="0" i="0">
+              <a:rPr sz="1250" b="0" i="0">
                 <a:solidFill>
-                  <a:srgbClr val="B4C7D2"/>
+                  <a:srgbClr val="F2B880"/>
                 </a:solidFill>
                 <a:latin typeface="Arial"/>
               </a:rPr>
-              <a:t>• V_i, R_i: bubble sites</a:t>
-            </a:r>
-          </a:p>
-        </p:txBody>
-      </p:sp>
-      <p:sp>
-        <p:nvSpPr>
-          <p:cNvPr id="15" name="C3-E12 text 13" descr="sci-ppt:o013"/>
-          <p:cNvSpPr txBox="1"/>
-          <p:nvPr/>
-        </p:nvSpPr>
-        <p:spPr>
-          <a:xfrm>
-            <a:off x="6217920" y="4096512"/>
-            <a:ext cx="5715000" cy="246888"/>
-          </a:xfrm>
-          <a:prstGeom prst="rect">
-            <a:avLst/>
-          </a:prstGeom>
-          <a:noFill/>
-          <a:effectLst/>
-        </p:spPr>
-        <p:txBody>
-          <a:bodyPr wrap="square" lIns="27432" rIns="27432" tIns="18288" bIns="18288" anchor="ctr">
-            <a:spAutoFit/>
-          </a:bodyPr>
-          <a:lstStyle/>
+              <a:t>A spatial sum needs source histories and travel times, not just a site</a:t>
+            </a:r>
+          </a:p>
           <a:p>
             <a:pPr algn="l">
               <a:spcAft>
@@ -3547,27 +5887,27 @@
               </a:spcAft>
             </a:pPr>
             <a:r>
-              <a:rPr sz="1150" b="0" i="0">
+              <a:rPr sz="1250" b="0" i="0">
                 <a:solidFill>
-                  <a:srgbClr val="B4C7D2"/>
+                  <a:srgbClr val="F2B880"/>
                 </a:solidFill>
                 <a:latin typeface="Arial"/>
               </a:rPr>
-              <a:t>• V_Ω representative region</a:t>
-            </a:r>
-          </a:p>
-        </p:txBody>
-      </p:sp>
-      <p:sp>
-        <p:nvSpPr>
-          <p:cNvPr id="16" name="C3-E12 text 14" descr="sci-ppt:o014"/>
+              <a:t>count.</a:t>
+            </a:r>
+          </a:p>
+        </p:txBody>
+      </p:sp>
+      <p:sp>
+        <p:nvSpPr>
+          <p:cNvPr id="81" name="C3-E12 text 79" descr="sci-ppt:o079"/>
           <p:cNvSpPr txBox="1"/>
           <p:nvPr/>
         </p:nvSpPr>
         <p:spPr>
           <a:xfrm>
-            <a:off x="320040" y="4329684"/>
-            <a:ext cx="5715000" cy="246888"/>
+            <a:off x="320040" y="6510528"/>
+            <a:ext cx="11521440" cy="200660"/>
           </a:xfrm>
           <a:prstGeom prst="rect">
             <a:avLst/>
@@ -3576,327 +5916,7 @@
           <a:effectLst/>
         </p:spPr>
         <p:txBody>
-          <a:bodyPr wrap="square" lIns="27432" rIns="27432" tIns="18288" bIns="18288" anchor="ctr">
-            <a:spAutoFit/>
-          </a:bodyPr>
-          <a:lstStyle/>
-          <a:p>
-            <a:pPr algn="l">
-              <a:spcAft>
-                <a:spcPts val="0"/>
-              </a:spcAft>
-            </a:pPr>
-            <a:r>
-              <a:rPr sz="1150" b="0" i="0">
-                <a:solidFill>
-                  <a:srgbClr val="B4C7D2"/>
-                </a:solidFill>
-                <a:latin typeface="Arial"/>
-              </a:rPr>
-              <a:t>• φ_b = ΣV_i / V_Ω</a:t>
-            </a:r>
-          </a:p>
-        </p:txBody>
-      </p:sp>
-      <p:sp>
-        <p:nvSpPr>
-          <p:cNvPr id="17" name="C3-E12 text 15" descr="sci-ppt:o015"/>
-          <p:cNvSpPr txBox="1"/>
-          <p:nvPr/>
-        </p:nvSpPr>
-        <p:spPr>
-          <a:xfrm>
-            <a:off x="6217920" y="4329684"/>
-            <a:ext cx="5715000" cy="246888"/>
-          </a:xfrm>
-          <a:prstGeom prst="rect">
-            <a:avLst/>
-          </a:prstGeom>
-          <a:noFill/>
-          <a:effectLst/>
-        </p:spPr>
-        <p:txBody>
-          <a:bodyPr wrap="square" lIns="27432" rIns="27432" tIns="18288" bIns="18288" anchor="ctr">
-            <a:spAutoFit/>
-          </a:bodyPr>
-          <a:lstStyle/>
-          <a:p>
-            <a:pPr algn="l">
-              <a:spcAft>
-                <a:spcPts val="0"/>
-              </a:spcAft>
-            </a:pPr>
-            <a:r>
-              <a:rPr sz="1150" b="0" i="0">
-                <a:solidFill>
-                  <a:srgbClr val="B4C7D2"/>
-                </a:solidFill>
-                <a:latin typeface="Arial"/>
-              </a:rPr>
-              <a:t>• s, R: cubic-cell geometry</a:t>
-            </a:r>
-          </a:p>
-        </p:txBody>
-      </p:sp>
-      <p:sp>
-        <p:nvSpPr>
-          <p:cNvPr id="18" name="C3-E12 text 16" descr="sci-ppt:o016"/>
-          <p:cNvSpPr txBox="1"/>
-          <p:nvPr/>
-        </p:nvSpPr>
-        <p:spPr>
-          <a:xfrm>
-            <a:off x="320040" y="4562856"/>
-            <a:ext cx="5715000" cy="246888"/>
-          </a:xfrm>
-          <a:prstGeom prst="rect">
-            <a:avLst/>
-          </a:prstGeom>
-          <a:noFill/>
-          <a:effectLst/>
-        </p:spPr>
-        <p:txBody>
-          <a:bodyPr wrap="square" lIns="27432" rIns="27432" tIns="18288" bIns="18288" anchor="ctr">
-            <a:spAutoFit/>
-          </a:bodyPr>
-          <a:lstStyle/>
-          <a:p>
-            <a:pPr algn="l">
-              <a:spcAft>
-                <a:spcPts val="0"/>
-              </a:spcAft>
-            </a:pPr>
-            <a:r>
-              <a:rPr sz="1150" b="0" i="0">
-                <a:solidFill>
-                  <a:srgbClr val="B4C7D2"/>
-                </a:solidFill>
-                <a:latin typeface="Arial"/>
-              </a:rPr>
-              <a:t>• r_i → observation x</a:t>
-            </a:r>
-          </a:p>
-        </p:txBody>
-      </p:sp>
-      <p:sp>
-        <p:nvSpPr>
-          <p:cNvPr id="19" name="C3-E12 text 17" descr="sci-ppt:o017"/>
-          <p:cNvSpPr txBox="1"/>
-          <p:nvPr/>
-        </p:nvSpPr>
-        <p:spPr>
-          <a:xfrm>
-            <a:off x="6217920" y="4562856"/>
-            <a:ext cx="5715000" cy="246888"/>
-          </a:xfrm>
-          <a:prstGeom prst="rect">
-            <a:avLst/>
-          </a:prstGeom>
-          <a:noFill/>
-          <a:effectLst/>
-        </p:spPr>
-        <p:txBody>
-          <a:bodyPr wrap="square" lIns="27432" rIns="27432" tIns="18288" bIns="18288" anchor="ctr">
-            <a:spAutoFit/>
-          </a:bodyPr>
-          <a:lstStyle/>
-          <a:p>
-            <a:pPr algn="l">
-              <a:spcAft>
-                <a:spcPts val="0"/>
-              </a:spcAft>
-            </a:pPr>
-            <a:r>
-              <a:rPr sz="1150" b="0" i="0">
-                <a:solidFill>
-                  <a:srgbClr val="B4C7D2"/>
-                </a:solidFill>
-                <a:latin typeface="Arial"/>
-              </a:rPr>
-              <a:t>• p′, φ at time t</a:t>
-            </a:r>
-          </a:p>
-        </p:txBody>
-      </p:sp>
-      <p:sp>
-        <p:nvSpPr>
-          <p:cNvPr id="20" name="C3-E12 text 18" descr="sci-ppt:o018"/>
-          <p:cNvSpPr txBox="1"/>
-          <p:nvPr/>
-        </p:nvSpPr>
-        <p:spPr>
-          <a:xfrm>
-            <a:off x="320040" y="4796028"/>
-            <a:ext cx="5715000" cy="246888"/>
-          </a:xfrm>
-          <a:prstGeom prst="rect">
-            <a:avLst/>
-          </a:prstGeom>
-          <a:noFill/>
-          <a:effectLst/>
-        </p:spPr>
-        <p:txBody>
-          <a:bodyPr wrap="square" lIns="27432" rIns="27432" tIns="18288" bIns="18288" anchor="ctr">
-            <a:spAutoFit/>
-          </a:bodyPr>
-          <a:lstStyle/>
-          <a:p>
-            <a:pPr algn="l">
-              <a:spcAft>
-                <a:spcPts val="0"/>
-              </a:spcAft>
-            </a:pPr>
-            <a:r>
-              <a:rPr sz="1150" b="0" i="0">
-                <a:solidFill>
-                  <a:srgbClr val="B4C7D2"/>
-                </a:solidFill>
-                <a:latin typeface="Arial"/>
-              </a:rPr>
-              <a:t>• ρ, c; V̇_i, V̈_i; t − r_i/c</a:t>
-            </a:r>
-          </a:p>
-        </p:txBody>
-      </p:sp>
-      <p:sp>
-        <p:nvSpPr>
-          <p:cNvPr id="21" name="C3-E12 text 19" descr="sci-ppt:o019"/>
-          <p:cNvSpPr txBox="1"/>
-          <p:nvPr/>
-        </p:nvSpPr>
-        <p:spPr>
-          <a:xfrm>
-            <a:off x="320040" y="5596128"/>
-            <a:ext cx="11430000" cy="292608"/>
-          </a:xfrm>
-          <a:prstGeom prst="rect">
-            <a:avLst/>
-          </a:prstGeom>
-          <a:noFill/>
-          <a:effectLst/>
-        </p:spPr>
-        <p:txBody>
-          <a:bodyPr wrap="square" lIns="27432" rIns="27432" tIns="18288" bIns="18288" anchor="ctr">
-            <a:spAutoFit/>
-          </a:bodyPr>
-          <a:lstStyle/>
-          <a:p>
-            <a:pPr algn="l">
-              <a:spcAft>
-                <a:spcPts val="0"/>
-              </a:spcAft>
-            </a:pPr>
-            <a:r>
-              <a:rPr sz="1150" b="0" i="0">
-                <a:solidFill>
-                  <a:srgbClr val="8EDBD4"/>
-                </a:solidFill>
-                <a:latin typeface="Arial"/>
-              </a:rPr>
-              <a:t>Planar arrays require a declared layer thickness</a:t>
-            </a:r>
-          </a:p>
-        </p:txBody>
-      </p:sp>
-      <p:sp>
-        <p:nvSpPr>
-          <p:cNvPr id="22" name="C3-E12 text 20" descr="sci-ppt:o020"/>
-          <p:cNvSpPr txBox="1"/>
-          <p:nvPr/>
-        </p:nvSpPr>
-        <p:spPr>
-          <a:xfrm>
-            <a:off x="320040" y="5870448"/>
-            <a:ext cx="11430000" cy="292608"/>
-          </a:xfrm>
-          <a:prstGeom prst="rect">
-            <a:avLst/>
-          </a:prstGeom>
-          <a:noFill/>
-          <a:effectLst/>
-        </p:spPr>
-        <p:txBody>
-          <a:bodyPr wrap="square" lIns="27432" rIns="27432" tIns="18288" bIns="18288" anchor="ctr">
-            <a:spAutoFit/>
-          </a:bodyPr>
-          <a:lstStyle/>
-          <a:p>
-            <a:pPr algn="l">
-              <a:spcAft>
-                <a:spcPts val="0"/>
-              </a:spcAft>
-            </a:pPr>
-            <a:r>
-              <a:rPr sz="1150" b="0" i="0">
-                <a:solidFill>
-                  <a:srgbClr val="8EDBD4"/>
-                </a:solidFill>
-                <a:latin typeface="Arial"/>
-              </a:rPr>
-              <a:t>Activation and propagation delays affect overlap</a:t>
-            </a:r>
-          </a:p>
-        </p:txBody>
-      </p:sp>
-      <p:sp>
-        <p:nvSpPr>
-          <p:cNvPr id="23" name="C3-E12 text 21" descr="sci-ppt:o021"/>
-          <p:cNvSpPr txBox="1"/>
-          <p:nvPr/>
-        </p:nvSpPr>
-        <p:spPr>
-          <a:xfrm>
-            <a:off x="320040" y="6144768"/>
-            <a:ext cx="11430000" cy="292608"/>
-          </a:xfrm>
-          <a:prstGeom prst="rect">
-            <a:avLst/>
-          </a:prstGeom>
-          <a:noFill/>
-          <a:effectLst/>
-        </p:spPr>
-        <p:txBody>
-          <a:bodyPr wrap="square" lIns="27432" rIns="27432" tIns="18288" bIns="18288" anchor="ctr">
-            <a:spAutoFit/>
-          </a:bodyPr>
-          <a:lstStyle/>
-          <a:p>
-            <a:pPr algn="l">
-              <a:spcAft>
-                <a:spcPts val="0"/>
-              </a:spcAft>
-            </a:pPr>
-            <a:r>
-              <a:rPr sz="1150" b="0" i="0">
-                <a:solidFill>
-                  <a:srgbClr val="8EDBD4"/>
-                </a:solidFill>
-                <a:latin typeface="Arial"/>
-              </a:rPr>
-              <a:t>Weak far-field sources do not predict impact pressure</a:t>
-            </a:r>
-          </a:p>
-        </p:txBody>
-      </p:sp>
-      <p:sp>
-        <p:nvSpPr>
-          <p:cNvPr id="24" name="C3-E12 text 22" descr="sci-ppt:o022"/>
-          <p:cNvSpPr txBox="1"/>
-          <p:nvPr/>
-        </p:nvSpPr>
-        <p:spPr>
-          <a:xfrm>
-            <a:off x="320040" y="6473952"/>
-            <a:ext cx="11430000" cy="256032"/>
-          </a:xfrm>
-          <a:prstGeom prst="rect">
-            <a:avLst/>
-          </a:prstGeom>
-          <a:noFill/>
-          <a:effectLst/>
-        </p:spPr>
-        <p:txBody>
-          <a:bodyPr wrap="square" lIns="27432" rIns="27432" tIns="18288" bIns="18288" anchor="ctr">
+          <a:bodyPr wrap="none" lIns="18288" rIns="18288" tIns="18288" bIns="18288" anchor="t">
             <a:spAutoFit/>
           </a:bodyPr>
           <a:lstStyle/>
@@ -3913,7 +5933,7 @@
                 </a:solidFill>
                 <a:latin typeface="Arial"/>
               </a:rPr>
-              <a:t>Model schematic; geometry is not to scale.</a:t>
+              <a:t>Volume fraction and retarded monopole approximation of Eq. C3-E12 (far, compact, weak sources).</a:t>
             </a:r>
           </a:p>
         </p:txBody>
